--- a/slides/06_CSP.pptx
+++ b/slides/06_CSP.pptx
@@ -5,7 +5,7 @@
     <p:sldMasterId id="2147483673" r:id="rId1"/>
   </p:sldMasterIdLst>
   <p:notesMasterIdLst>
-    <p:notesMasterId r:id="rId24"/>
+    <p:notesMasterId r:id="rId25"/>
   </p:notesMasterIdLst>
   <p:sldIdLst>
     <p:sldId id="330" r:id="rId2"/>
@@ -23,13 +23,14 @@
     <p:sldId id="268" r:id="rId14"/>
     <p:sldId id="273" r:id="rId15"/>
     <p:sldId id="269" r:id="rId16"/>
-    <p:sldId id="307" r:id="rId17"/>
-    <p:sldId id="317" r:id="rId18"/>
-    <p:sldId id="322" r:id="rId19"/>
-    <p:sldId id="329" r:id="rId20"/>
-    <p:sldId id="304" r:id="rId21"/>
-    <p:sldId id="326" r:id="rId22"/>
-    <p:sldId id="327" r:id="rId23"/>
+    <p:sldId id="486" r:id="rId17"/>
+    <p:sldId id="307" r:id="rId18"/>
+    <p:sldId id="317" r:id="rId19"/>
+    <p:sldId id="322" r:id="rId20"/>
+    <p:sldId id="329" r:id="rId21"/>
+    <p:sldId id="304" r:id="rId22"/>
+    <p:sldId id="326" r:id="rId23"/>
+    <p:sldId id="327" r:id="rId24"/>
   </p:sldIdLst>
   <p:sldSz cx="9144000" cy="6858000" type="screen4x3"/>
   <p:notesSz cx="7315200" cy="9601200"/>
@@ -152,6 +153,7 @@
             <p14:sldId id="268"/>
             <p14:sldId id="273"/>
             <p14:sldId id="269"/>
+            <p14:sldId id="486"/>
             <p14:sldId id="307"/>
             <p14:sldId id="317"/>
             <p14:sldId id="322"/>
@@ -1107,7 +1109,7 @@
             <a:fld id="{D21C7BEE-7BA7-4369-9E3D-FA3E2F4A54A1}" type="slidenum">
               <a:rPr lang="en-US" smtClean="0"/>
               <a:pPr/>
-              <a:t>16</a:t>
+              <a:t>17</a:t>
             </a:fld>
             <a:endParaRPr lang="en-US"/>
           </a:p>
@@ -1189,7 +1191,7 @@
             <a:fld id="{D21C7BEE-7BA7-4369-9E3D-FA3E2F4A54A1}" type="slidenum">
               <a:rPr lang="en-US" smtClean="0"/>
               <a:pPr/>
-              <a:t>17</a:t>
+              <a:t>18</a:t>
             </a:fld>
             <a:endParaRPr lang="en-US"/>
           </a:p>
@@ -1271,7 +1273,7 @@
             <a:fld id="{D21C7BEE-7BA7-4369-9E3D-FA3E2F4A54A1}" type="slidenum">
               <a:rPr lang="en-US" smtClean="0"/>
               <a:pPr/>
-              <a:t>18</a:t>
+              <a:t>19</a:t>
             </a:fld>
             <a:endParaRPr lang="en-US"/>
           </a:p>
@@ -1353,7 +1355,7 @@
             <a:fld id="{D21C7BEE-7BA7-4369-9E3D-FA3E2F4A54A1}" type="slidenum">
               <a:rPr lang="en-US" smtClean="0"/>
               <a:pPr/>
-              <a:t>19</a:t>
+              <a:t>20</a:t>
             </a:fld>
             <a:endParaRPr lang="en-US"/>
           </a:p>
@@ -1440,7 +1442,7 @@
             <a:fld id="{CA8F1D18-9638-4932-8910-B6EDCB447AA8}" type="slidenum">
               <a:rPr lang="en-US" smtClean="0"/>
               <a:pPr/>
-              <a:t>20</a:t>
+              <a:t>21</a:t>
             </a:fld>
             <a:endParaRPr lang="en-US"/>
           </a:p>
@@ -1522,7 +1524,7 @@
             <a:fld id="{D21C7BEE-7BA7-4369-9E3D-FA3E2F4A54A1}" type="slidenum">
               <a:rPr lang="en-US" smtClean="0"/>
               <a:pPr/>
-              <a:t>21</a:t>
+              <a:t>22</a:t>
             </a:fld>
             <a:endParaRPr lang="en-US"/>
           </a:p>
@@ -1686,7 +1688,7 @@
             <a:fld id="{D21C7BEE-7BA7-4369-9E3D-FA3E2F4A54A1}" type="slidenum">
               <a:rPr lang="en-US" smtClean="0"/>
               <a:pPr/>
-              <a:t>22</a:t>
+              <a:t>23</a:t>
             </a:fld>
             <a:endParaRPr lang="en-US"/>
           </a:p>
@@ -2450,7 +2452,7 @@
           <a:p>
             <a:fld id="{FDB68C03-DCF9-4B87-BBF6-8F2088376604}" type="datetimeFigureOut">
               <a:rPr lang="en-US" smtClean="0"/>
-              <a:t>6/4/2025</a:t>
+              <a:t>10/23/2026</a:t>
             </a:fld>
             <a:endParaRPr lang="en-US"/>
           </a:p>
@@ -3060,7 +3062,7 @@
           <a:p>
             <a:fld id="{FDB68C03-DCF9-4B87-BBF6-8F2088376604}" type="datetimeFigureOut">
               <a:rPr lang="en-US" smtClean="0"/>
-              <a:t>6/4/2025</a:t>
+              <a:t>10/23/2026</a:t>
             </a:fld>
             <a:endParaRPr lang="en-US"/>
           </a:p>
@@ -3335,7 +3337,7 @@
           <a:p>
             <a:fld id="{FDB68C03-DCF9-4B87-BBF6-8F2088376604}" type="datetimeFigureOut">
               <a:rPr lang="en-US" smtClean="0"/>
-              <a:t>6/4/2025</a:t>
+              <a:t>10/23/2026</a:t>
             </a:fld>
             <a:endParaRPr lang="en-US"/>
           </a:p>
@@ -5124,7 +5126,7 @@
           <a:p>
             <a:fld id="{FDB68C03-DCF9-4B87-BBF6-8F2088376604}" type="datetimeFigureOut">
               <a:rPr lang="en-US" smtClean="0"/>
-              <a:t>6/4/2025</a:t>
+              <a:t>10/23/2026</a:t>
             </a:fld>
             <a:endParaRPr lang="en-US"/>
           </a:p>
@@ -7161,8 +7163,8 @@
           </a:p>
         </p:txBody>
       </p:sp>
-      <mc:AlternateContent xmlns:mc="http://schemas.openxmlformats.org/markup-compatibility/2006">
-        <mc:Choice xmlns:a14="http://schemas.microsoft.com/office/drawing/2010/main" Requires="a14">
+      <mc:AlternateContent xmlns:mc="http://schemas.openxmlformats.org/markup-compatibility/2006" xmlns:a14="http://schemas.microsoft.com/office/drawing/2010/main">
+        <mc:Choice Requires="a14">
           <p:sp>
             <p:nvSpPr>
               <p:cNvPr id="14339" name="Rectangle 3"/>
@@ -7247,7 +7249,7 @@
                     <m:sSup>
                       <m:sSupPr>
                         <m:ctrlPr>
-                          <a:rPr lang="en-US" sz="2100" i="1" dirty="0" smtClean="0">
+                          <a:rPr lang="en-US" sz="2100" b="0" i="1" dirty="0" smtClean="0">
                             <a:solidFill>
                               <a:srgbClr val="C00000"/>
                             </a:solidFill>
@@ -7329,7 +7331,7 @@
             </p:txBody>
           </p:sp>
         </mc:Choice>
-        <mc:Fallback>
+        <mc:Fallback xmlns="">
           <p:sp>
             <p:nvSpPr>
               <p:cNvPr id="14339" name="Rectangle 3"/>
@@ -8552,6 +8554,127 @@
 </file>
 
 <file path=ppt/slides/slide16.xml><?xml version="1.0" encoding="utf-8"?>
+<p:sld xmlns:a="http://schemas.openxmlformats.org/drawingml/2006/main" xmlns:r="http://schemas.openxmlformats.org/officeDocument/2006/relationships" xmlns:p="http://schemas.openxmlformats.org/presentationml/2006/main">
+  <p:cSld>
+    <p:spTree>
+      <p:nvGrpSpPr>
+        <p:cNvPr id="1" name=""/>
+        <p:cNvGrpSpPr/>
+        <p:nvPr/>
+      </p:nvGrpSpPr>
+      <p:grpSpPr>
+        <a:xfrm>
+          <a:off x="0" y="0"/>
+          <a:ext cx="0" cy="0"/>
+          <a:chOff x="0" y="0"/>
+          <a:chExt cx="0" cy="0"/>
+        </a:xfrm>
+      </p:grpSpPr>
+      <p:sp>
+        <p:nvSpPr>
+          <p:cNvPr id="4" name="Title 3">
+            <a:extLst>
+              <a:ext uri="{FF2B5EF4-FFF2-40B4-BE49-F238E27FC236}">
+                <a16:creationId xmlns:a16="http://schemas.microsoft.com/office/drawing/2014/main" id="{24CD2877-1046-6123-CF1E-BE9F2D8536CB}"/>
+              </a:ext>
+            </a:extLst>
+          </p:cNvPr>
+          <p:cNvSpPr>
+            <a:spLocks noGrp="1"/>
+          </p:cNvSpPr>
+          <p:nvPr>
+            <p:ph type="title"/>
+          </p:nvPr>
+        </p:nvSpPr>
+        <p:spPr>
+          <a:xfrm>
+            <a:off x="829115" y="2931914"/>
+            <a:ext cx="7886700" cy="876035"/>
+          </a:xfrm>
+        </p:spPr>
+        <p:txBody>
+          <a:bodyPr>
+            <a:noAutofit/>
+          </a:bodyPr>
+          <a:lstStyle/>
+          <a:p>
+            <a:r>
+              <a:rPr lang="en-US" sz="3200" b="1" dirty="0">
+                <a:latin typeface="+mn-lt"/>
+              </a:rPr>
+              <a:t>Code example</a:t>
+            </a:r>
+            <a:r>
+              <a:rPr lang="en-US" sz="3200">
+                <a:latin typeface="+mn-lt"/>
+              </a:rPr>
+              <a:t>: Solving Graph Coloring using Simple Backtracking Search</a:t>
+            </a:r>
+            <a:endParaRPr lang="en-US" sz="3200" dirty="0">
+              <a:latin typeface="+mn-lt"/>
+            </a:endParaRPr>
+          </a:p>
+        </p:txBody>
+      </p:sp>
+      <p:sp>
+        <p:nvSpPr>
+          <p:cNvPr id="5" name="TextBox 4">
+            <a:extLst>
+              <a:ext uri="{FF2B5EF4-FFF2-40B4-BE49-F238E27FC236}">
+                <a16:creationId xmlns:a16="http://schemas.microsoft.com/office/drawing/2014/main" id="{5AA484FF-058C-4694-424C-0B3B26DF9F45}"/>
+              </a:ext>
+            </a:extLst>
+          </p:cNvPr>
+          <p:cNvSpPr txBox="1"/>
+          <p:nvPr/>
+        </p:nvSpPr>
+        <p:spPr>
+          <a:xfrm>
+            <a:off x="893299" y="5365946"/>
+            <a:ext cx="6608298" cy="253916"/>
+          </a:xfrm>
+          <a:prstGeom prst="rect">
+            <a:avLst/>
+          </a:prstGeom>
+          <a:noFill/>
+        </p:spPr>
+        <p:txBody>
+          <a:bodyPr wrap="square" rtlCol="0">
+            <a:spAutoFit/>
+          </a:bodyPr>
+          <a:lstStyle/>
+          <a:p>
+            <a:r>
+              <a:rPr lang="en-US" sz="1050" dirty="0"/>
+              <a:t>See Code on </a:t>
+            </a:r>
+            <a:r>
+              <a:rPr lang="en-US" sz="1050" dirty="0">
+                <a:hlinkClick r:id="rId2"/>
+              </a:rPr>
+              <a:t>https://michael.hahsler.net/Introduction_to_Artificial_Intelligence/</a:t>
+            </a:r>
+            <a:r>
+              <a:rPr lang="en-US" sz="1050" dirty="0"/>
+              <a:t> </a:t>
+            </a:r>
+          </a:p>
+        </p:txBody>
+      </p:sp>
+    </p:spTree>
+    <p:extLst>
+      <p:ext uri="{BB962C8B-B14F-4D97-AF65-F5344CB8AC3E}">
+        <p14:creationId xmlns:p14="http://schemas.microsoft.com/office/powerpoint/2010/main" val="190193640"/>
+      </p:ext>
+    </p:extLst>
+  </p:cSld>
+  <p:clrMapOvr>
+    <a:masterClrMapping/>
+  </p:clrMapOvr>
+</p:sld>
+</file>
+
+<file path=ppt/slides/slide17.xml><?xml version="1.0" encoding="utf-8"?>
 <p:sld xmlns:a="http://schemas.openxmlformats.org/drawingml/2006/main" xmlns:r="http://schemas.openxmlformats.org/officeDocument/2006/relationships" xmlns:p="http://schemas.openxmlformats.org/presentationml/2006/main" show="0">
   <p:cSld>
     <p:spTree>
@@ -9047,7 +9170,7 @@
 </p:sld>
 </file>
 
-<file path=ppt/slides/slide17.xml><?xml version="1.0" encoding="utf-8"?>
+<file path=ppt/slides/slide18.xml><?xml version="1.0" encoding="utf-8"?>
 <p:sld xmlns:a="http://schemas.openxmlformats.org/drawingml/2006/main" xmlns:r="http://schemas.openxmlformats.org/officeDocument/2006/relationships" xmlns:p="http://schemas.openxmlformats.org/presentationml/2006/main" show="0">
   <p:cSld>
     <p:spTree>
@@ -9389,7 +9512,7 @@
 </p:sld>
 </file>
 
-<file path=ppt/slides/slide18.xml><?xml version="1.0" encoding="utf-8"?>
+<file path=ppt/slides/slide19.xml><?xml version="1.0" encoding="utf-8"?>
 <p:sld xmlns:a="http://schemas.openxmlformats.org/drawingml/2006/main" xmlns:r="http://schemas.openxmlformats.org/officeDocument/2006/relationships" xmlns:p="http://schemas.openxmlformats.org/presentationml/2006/main" show="0">
   <p:cSld>
     <p:spTree>
@@ -9792,7 +9915,1199 @@
 </p:sld>
 </file>
 
-<file path=ppt/slides/slide19.xml><?xml version="1.0" encoding="utf-8"?>
+<file path=ppt/slides/slide2.xml><?xml version="1.0" encoding="utf-8"?>
+<p:sld xmlns:a="http://schemas.openxmlformats.org/drawingml/2006/main" xmlns:r="http://schemas.openxmlformats.org/officeDocument/2006/relationships" xmlns:p="http://schemas.openxmlformats.org/presentationml/2006/main">
+  <p:cSld>
+    <p:spTree>
+      <p:nvGrpSpPr>
+        <p:cNvPr id="1" name=""/>
+        <p:cNvGrpSpPr/>
+        <p:nvPr/>
+      </p:nvGrpSpPr>
+      <p:grpSpPr>
+        <a:xfrm>
+          <a:off x="0" y="0"/>
+          <a:ext cx="0" cy="0"/>
+          <a:chOff x="0" y="0"/>
+          <a:chExt cx="0" cy="0"/>
+        </a:xfrm>
+      </p:grpSpPr>
+      <p:sp>
+        <p:nvSpPr>
+          <p:cNvPr id="5122" name="Rectangle 2"/>
+          <p:cNvSpPr>
+            <a:spLocks noGrp="1" noChangeArrowheads="1"/>
+          </p:cNvSpPr>
+          <p:nvPr>
+            <p:ph type="title"/>
+          </p:nvPr>
+        </p:nvSpPr>
+        <p:spPr/>
+        <p:txBody>
+          <a:bodyPr/>
+          <a:lstStyle/>
+          <a:p>
+            <a:r>
+              <a:rPr lang="en-US" sz="3200" dirty="0"/>
+              <a:t>Constraint Satisfaction Problems (CSPs)</a:t>
+            </a:r>
+          </a:p>
+        </p:txBody>
+      </p:sp>
+      <mc:AlternateContent xmlns:mc="http://schemas.openxmlformats.org/markup-compatibility/2006" xmlns:a14="http://schemas.microsoft.com/office/drawing/2010/main">
+        <mc:Choice Requires="a14">
+          <p:sp>
+            <p:nvSpPr>
+              <p:cNvPr id="5123" name="Rectangle 3"/>
+              <p:cNvSpPr>
+                <a:spLocks noGrp="1" noChangeArrowheads="1"/>
+              </p:cNvSpPr>
+              <p:nvPr>
+                <p:ph idx="1"/>
+              </p:nvPr>
+            </p:nvSpPr>
+            <p:spPr>
+              <a:xfrm>
+                <a:off x="628650" y="3048000"/>
+                <a:ext cx="8058150" cy="3444874"/>
+              </a:xfrm>
+            </p:spPr>
+            <p:txBody>
+              <a:bodyPr>
+                <a:normAutofit fontScale="92500" lnSpcReduction="10000"/>
+              </a:bodyPr>
+              <a:lstStyle/>
+              <a:p>
+                <a:pPr marL="0" indent="0">
+                  <a:buNone/>
+                </a:pPr>
+                <a:r>
+                  <a:rPr lang="en-US" sz="2000" dirty="0"/>
+                  <a:t>Definition:</a:t>
+                </a:r>
+              </a:p>
+              <a:p>
+                <a:pPr lvl="1"/>
+                <a:r>
+                  <a:rPr lang="en-US" sz="2000" b="1" dirty="0">
+                    <a:solidFill>
+                      <a:srgbClr val="CC0000"/>
+                    </a:solidFill>
+                  </a:rPr>
+                  <a:t>State</a:t>
+                </a:r>
+                <a:r>
+                  <a:rPr lang="en-US" sz="2000" dirty="0"/>
+                  <a:t> is defined by a factored state representation:</a:t>
+                </a:r>
+              </a:p>
+              <a:p>
+                <a:pPr lvl="2"/>
+                <a:r>
+                  <a:rPr lang="en-US" sz="1700" dirty="0"/>
+                  <a:t>A set of variables </a:t>
+                </a:r>
+                <a:r>
+                  <a:rPr lang="en-US" sz="1700" i="1" dirty="0"/>
+                  <a:t>X</a:t>
+                </a:r>
+                <a:r>
+                  <a:rPr lang="en-US" sz="1700" i="1" baseline="-25000" dirty="0"/>
+                  <a:t>i  </a:t>
+                </a:r>
+                <a:r>
+                  <a:rPr lang="en-US" sz="1700" dirty="0"/>
+                  <a:t>called  </a:t>
+                </a:r>
+                <a:r>
+                  <a:rPr lang="en-US" sz="1700" dirty="0" err="1"/>
+                  <a:t>fluents</a:t>
+                </a:r>
+                <a:r>
+                  <a:rPr lang="en-US" sz="1700" dirty="0"/>
+                  <a:t>.</a:t>
+                </a:r>
+              </a:p>
+              <a:p>
+                <a:pPr lvl="1"/>
+                <a:r>
+                  <a:rPr lang="en-US" sz="2100" b="1" dirty="0">
+                    <a:solidFill>
+                      <a:srgbClr val="CC0000"/>
+                    </a:solidFill>
+                  </a:rPr>
+                  <a:t>Partial Solution: </a:t>
+                </a:r>
+                <a:r>
+                  <a:rPr lang="en-US" sz="2000" dirty="0"/>
+                  <a:t>Each variable can have a value from domain </a:t>
+                </a:r>
+                <a:r>
+                  <a:rPr lang="en-US" sz="2000" i="1" dirty="0"/>
+                  <a:t>D</a:t>
+                </a:r>
+                <a:r>
+                  <a:rPr lang="en-US" sz="2000" i="1" baseline="-25000" dirty="0"/>
+                  <a:t>i  </a:t>
+                </a:r>
+                <a:r>
+                  <a:rPr lang="en-US" sz="2000" dirty="0"/>
+                  <a:t>or be </a:t>
+                </a:r>
+                <a:r>
+                  <a:rPr lang="en-US" sz="2100" b="1" dirty="0"/>
+                  <a:t>unassigned</a:t>
+                </a:r>
+                <a:r>
+                  <a:rPr lang="en-US" sz="2000" dirty="0"/>
+                  <a:t>.</a:t>
+                </a:r>
+                <a:endParaRPr lang="en-US" sz="2000" b="1" dirty="0">
+                  <a:solidFill>
+                    <a:srgbClr val="CC0000"/>
+                  </a:solidFill>
+                </a:endParaRPr>
+              </a:p>
+              <a:p>
+                <a:pPr lvl="1"/>
+                <a:r>
+                  <a:rPr lang="en-US" sz="2000" b="1" dirty="0">
+                    <a:solidFill>
+                      <a:srgbClr val="CC0000"/>
+                    </a:solidFill>
+                  </a:rPr>
+                  <a:t>Constraints </a:t>
+                </a:r>
+                <a:r>
+                  <a:rPr lang="en-US" sz="2000" dirty="0"/>
+                  <a:t>are a set of rules specifying allowable combinations of values for subsets of the variables.</a:t>
+                </a:r>
+                <a:br>
+                  <a:rPr lang="en-US" sz="2000" dirty="0"/>
+                </a:br>
+                <a:r>
+                  <a:rPr lang="en-US" sz="2000" dirty="0"/>
+                  <a:t>		E.g., </a:t>
+                </a:r>
+                <a14:m>
+                  <m:oMath xmlns:m="http://schemas.openxmlformats.org/officeDocument/2006/math">
+                    <m:sSub>
+                      <m:sSubPr>
+                        <m:ctrlPr>
+                          <a:rPr lang="en-US" sz="2000" b="0" i="1" smtClean="0">
+                            <a:latin typeface="Cambria Math" panose="02040503050406030204" pitchFamily="18" charset="0"/>
+                          </a:rPr>
+                        </m:ctrlPr>
+                      </m:sSubPr>
+                      <m:e>
+                        <m:r>
+                          <a:rPr lang="en-US" sz="2000" b="0" i="1" smtClean="0">
+                            <a:latin typeface="Cambria Math" panose="02040503050406030204" pitchFamily="18" charset="0"/>
+                          </a:rPr>
+                          <m:t>𝑋</m:t>
+                        </m:r>
+                      </m:e>
+                      <m:sub>
+                        <m:r>
+                          <a:rPr lang="en-US" sz="2000" b="0" i="1" smtClean="0">
+                            <a:latin typeface="Cambria Math" panose="02040503050406030204" pitchFamily="18" charset="0"/>
+                          </a:rPr>
+                          <m:t>1</m:t>
+                        </m:r>
+                      </m:sub>
+                    </m:sSub>
+                    <m:r>
+                      <a:rPr lang="en-US" sz="2000" b="0" i="1" smtClean="0">
+                        <a:latin typeface="Cambria Math" panose="02040503050406030204" pitchFamily="18" charset="0"/>
+                      </a:rPr>
+                      <m:t>=3</m:t>
+                    </m:r>
+                  </m:oMath>
+                </a14:m>
+                <a:r>
+                  <a:rPr lang="en-US" sz="2000" dirty="0"/>
+                  <a:t>, </a:t>
+                </a:r>
+                <a14:m>
+                  <m:oMath xmlns:m="http://schemas.openxmlformats.org/officeDocument/2006/math">
+                    <m:r>
+                      <a:rPr lang="en-US" sz="2000" i="1" dirty="0" smtClean="0">
+                        <a:latin typeface="Cambria Math" panose="02040503050406030204" pitchFamily="18" charset="0"/>
+                      </a:rPr>
+                      <m:t>𝑋</m:t>
+                    </m:r>
+                    <m:r>
+                      <a:rPr lang="en-US" sz="2000" i="1" baseline="-25000" dirty="0">
+                        <a:latin typeface="Cambria Math" panose="02040503050406030204" pitchFamily="18" charset="0"/>
+                      </a:rPr>
+                      <m:t>1 </m:t>
+                    </m:r>
+                    <m:r>
+                      <a:rPr lang="en-US" sz="2000" i="1" dirty="0" smtClean="0">
+                        <a:latin typeface="Cambria Math" panose="02040503050406030204" pitchFamily="18" charset="0"/>
+                        <a:ea typeface="Cambria Math" panose="02040503050406030204" pitchFamily="18" charset="0"/>
+                      </a:rPr>
+                      <m:t>≠</m:t>
+                    </m:r>
+                    <m:r>
+                      <a:rPr lang="en-US" sz="2000" i="1" dirty="0">
+                        <a:latin typeface="Cambria Math" panose="02040503050406030204" pitchFamily="18" charset="0"/>
+                      </a:rPr>
+                      <m:t> </m:t>
+                    </m:r>
+                    <m:r>
+                      <a:rPr lang="en-US" sz="2000" i="1" dirty="0">
+                        <a:latin typeface="Cambria Math" panose="02040503050406030204" pitchFamily="18" charset="0"/>
+                      </a:rPr>
+                      <m:t>𝑋</m:t>
+                    </m:r>
+                    <m:r>
+                      <a:rPr lang="en-US" sz="2000" i="1" baseline="-25000" dirty="0">
+                        <a:latin typeface="Cambria Math" panose="02040503050406030204" pitchFamily="18" charset="0"/>
+                      </a:rPr>
+                      <m:t>7</m:t>
+                    </m:r>
+                    <m:r>
+                      <a:rPr lang="en-US" sz="2000" i="1" dirty="0">
+                        <a:latin typeface="Cambria Math" panose="02040503050406030204" pitchFamily="18" charset="0"/>
+                      </a:rPr>
+                      <m:t> </m:t>
+                    </m:r>
+                  </m:oMath>
+                </a14:m>
+                <a:r>
+                  <a:rPr lang="en-US" sz="2000" dirty="0"/>
+                  <a:t>or </a:t>
+                </a:r>
+                <a14:m>
+                  <m:oMath xmlns:m="http://schemas.openxmlformats.org/officeDocument/2006/math">
+                    <m:r>
+                      <a:rPr lang="en-US" sz="2000" i="1" dirty="0" smtClean="0">
+                        <a:latin typeface="Cambria Math" panose="02040503050406030204" pitchFamily="18" charset="0"/>
+                      </a:rPr>
+                      <m:t>𝑋</m:t>
+                    </m:r>
+                    <m:r>
+                      <a:rPr lang="en-US" sz="2000" i="1" baseline="-25000" dirty="0">
+                        <a:latin typeface="Cambria Math" panose="02040503050406030204" pitchFamily="18" charset="0"/>
+                      </a:rPr>
+                      <m:t>2 </m:t>
+                    </m:r>
+                    <m:r>
+                      <a:rPr lang="en-US" sz="2000" i="1" dirty="0">
+                        <a:latin typeface="Cambria Math" panose="02040503050406030204" pitchFamily="18" charset="0"/>
+                      </a:rPr>
+                      <m:t>&gt; </m:t>
+                    </m:r>
+                    <m:r>
+                      <a:rPr lang="en-US" sz="2000" i="1" dirty="0">
+                        <a:latin typeface="Cambria Math" panose="02040503050406030204" pitchFamily="18" charset="0"/>
+                      </a:rPr>
+                      <m:t>𝑋</m:t>
+                    </m:r>
+                    <m:r>
+                      <a:rPr lang="en-US" sz="2000" i="1" baseline="-25000" dirty="0">
+                        <a:latin typeface="Cambria Math" panose="02040503050406030204" pitchFamily="18" charset="0"/>
+                      </a:rPr>
+                      <m:t>9 </m:t>
+                    </m:r>
+                    <m:r>
+                      <a:rPr lang="en-US" sz="2000" i="1" dirty="0">
+                        <a:latin typeface="Cambria Math" panose="02040503050406030204" pitchFamily="18" charset="0"/>
+                      </a:rPr>
+                      <m:t>+ 3</m:t>
+                    </m:r>
+                  </m:oMath>
+                </a14:m>
+                <a:endParaRPr lang="en-US" sz="2000" dirty="0"/>
+              </a:p>
+              <a:p>
+                <a:pPr lvl="1"/>
+                <a:endParaRPr lang="en-US" sz="2000" b="1" dirty="0">
+                  <a:solidFill>
+                    <a:srgbClr val="CC0000"/>
+                  </a:solidFill>
+                </a:endParaRPr>
+              </a:p>
+              <a:p>
+                <a:pPr lvl="1"/>
+                <a:r>
+                  <a:rPr lang="en-US" sz="2000" b="1" dirty="0">
+                    <a:solidFill>
+                      <a:srgbClr val="CC0000"/>
+                    </a:solidFill>
+                  </a:rPr>
+                  <a:t>Solution</a:t>
+                </a:r>
+                <a:r>
+                  <a:rPr lang="en-US" sz="2000" dirty="0"/>
+                  <a:t>: a state that is a</a:t>
+                </a:r>
+              </a:p>
+              <a:p>
+                <a:pPr marL="1028700" lvl="2" indent="-342900">
+                  <a:buFont typeface="+mj-lt"/>
+                  <a:buAutoNum type="alphaLcParenR"/>
+                </a:pPr>
+                <a:r>
+                  <a:rPr lang="en-US" sz="1800" b="1" dirty="0">
+                    <a:solidFill>
+                      <a:srgbClr val="C00000"/>
+                    </a:solidFill>
+                  </a:rPr>
+                  <a:t>Consistent assignment</a:t>
+                </a:r>
+                <a:r>
+                  <a:rPr lang="en-US" sz="1800" dirty="0"/>
+                  <a:t>: satisfies all constraints.</a:t>
+                </a:r>
+                <a:endParaRPr lang="en-US" sz="1800" dirty="0">
+                  <a:solidFill>
+                    <a:srgbClr val="FF0000"/>
+                  </a:solidFill>
+                </a:endParaRPr>
+              </a:p>
+              <a:p>
+                <a:pPr marL="1028700" lvl="2" indent="-342900">
+                  <a:buFont typeface="+mj-lt"/>
+                  <a:buAutoNum type="alphaLcParenR"/>
+                </a:pPr>
+                <a:r>
+                  <a:rPr lang="en-US" sz="1800" b="1" dirty="0">
+                    <a:solidFill>
+                      <a:srgbClr val="C00000"/>
+                    </a:solidFill>
+                  </a:rPr>
+                  <a:t>Complete assignment:</a:t>
+                </a:r>
+                <a:r>
+                  <a:rPr lang="en-US" sz="1800" dirty="0">
+                    <a:solidFill>
+                      <a:srgbClr val="FF0000"/>
+                    </a:solidFill>
+                  </a:rPr>
+                  <a:t> </a:t>
+                </a:r>
+                <a:r>
+                  <a:rPr lang="en-US" sz="1800" dirty="0"/>
+                  <a:t>assigns value to each variable.</a:t>
+                </a:r>
+              </a:p>
+            </p:txBody>
+          </p:sp>
+        </mc:Choice>
+        <mc:Fallback xmlns="">
+          <p:sp>
+            <p:nvSpPr>
+              <p:cNvPr id="5123" name="Rectangle 3"/>
+              <p:cNvSpPr>
+                <a:spLocks noGrp="1" noRot="1" noChangeAspect="1" noMove="1" noResize="1" noEditPoints="1" noAdjustHandles="1" noChangeArrowheads="1" noChangeShapeType="1" noTextEdit="1"/>
+              </p:cNvSpPr>
+              <p:nvPr>
+                <p:ph idx="1"/>
+              </p:nvPr>
+            </p:nvSpPr>
+            <p:spPr>
+              <a:xfrm>
+                <a:off x="628650" y="3048000"/>
+                <a:ext cx="8058150" cy="3444874"/>
+              </a:xfrm>
+              <a:blipFill>
+                <a:blip r:embed="rId3"/>
+                <a:stretch>
+                  <a:fillRect l="-681" t="-2301"/>
+                </a:stretch>
+              </a:blipFill>
+            </p:spPr>
+            <p:txBody>
+              <a:bodyPr/>
+              <a:lstStyle/>
+              <a:p>
+                <a:r>
+                  <a:rPr lang="en-US">
+                    <a:noFill/>
+                  </a:rPr>
+                  <a:t> </a:t>
+                </a:r>
+              </a:p>
+            </p:txBody>
+          </p:sp>
+        </mc:Fallback>
+      </mc:AlternateContent>
+      <p:sp>
+        <p:nvSpPr>
+          <p:cNvPr id="5" name="Star: 5 Points 4">
+            <a:extLst>
+              <a:ext uri="{FF2B5EF4-FFF2-40B4-BE49-F238E27FC236}">
+                <a16:creationId xmlns:a16="http://schemas.microsoft.com/office/drawing/2014/main" id="{C991C4F9-0A76-FF1E-E481-8912EE1EE828}"/>
+              </a:ext>
+              <a:ext uri="{C183D7F6-B498-43B3-948B-1728B52AA6E4}">
+                <adec:decorative xmlns:adec="http://schemas.microsoft.com/office/drawing/2017/decorative" val="1"/>
+              </a:ext>
+            </a:extLst>
+          </p:cNvPr>
+          <p:cNvSpPr/>
+          <p:nvPr/>
+        </p:nvSpPr>
+        <p:spPr>
+          <a:xfrm>
+            <a:off x="8763000" y="129075"/>
+            <a:ext cx="247650" cy="244474"/>
+          </a:xfrm>
+          <a:prstGeom prst="star5">
+            <a:avLst/>
+          </a:prstGeom>
+        </p:spPr>
+        <p:style>
+          <a:lnRef idx="2">
+            <a:schemeClr val="accent2">
+              <a:shade val="50000"/>
+            </a:schemeClr>
+          </a:lnRef>
+          <a:fillRef idx="1">
+            <a:schemeClr val="accent2"/>
+          </a:fillRef>
+          <a:effectRef idx="0">
+            <a:schemeClr val="accent2"/>
+          </a:effectRef>
+          <a:fontRef idx="minor">
+            <a:schemeClr val="lt1"/>
+          </a:fontRef>
+        </p:style>
+        <p:txBody>
+          <a:bodyPr rtlCol="0" anchor="ctr"/>
+          <a:lstStyle>
+            <a:defPPr>
+              <a:defRPr lang="en-US"/>
+            </a:defPPr>
+            <a:lvl1pPr marL="0" algn="l" defTabSz="914400" rtl="0" eaLnBrk="1" latinLnBrk="0" hangingPunct="1">
+              <a:defRPr sz="1800" kern="1200">
+                <a:solidFill>
+                  <a:schemeClr val="lt1"/>
+                </a:solidFill>
+                <a:latin typeface="+mn-lt"/>
+                <a:ea typeface="+mn-ea"/>
+                <a:cs typeface="+mn-cs"/>
+              </a:defRPr>
+            </a:lvl1pPr>
+            <a:lvl2pPr marL="457200" algn="l" defTabSz="914400" rtl="0" eaLnBrk="1" latinLnBrk="0" hangingPunct="1">
+              <a:defRPr sz="1800" kern="1200">
+                <a:solidFill>
+                  <a:schemeClr val="lt1"/>
+                </a:solidFill>
+                <a:latin typeface="+mn-lt"/>
+                <a:ea typeface="+mn-ea"/>
+                <a:cs typeface="+mn-cs"/>
+              </a:defRPr>
+            </a:lvl2pPr>
+            <a:lvl3pPr marL="914400" algn="l" defTabSz="914400" rtl="0" eaLnBrk="1" latinLnBrk="0" hangingPunct="1">
+              <a:defRPr sz="1800" kern="1200">
+                <a:solidFill>
+                  <a:schemeClr val="lt1"/>
+                </a:solidFill>
+                <a:latin typeface="+mn-lt"/>
+                <a:ea typeface="+mn-ea"/>
+                <a:cs typeface="+mn-cs"/>
+              </a:defRPr>
+            </a:lvl3pPr>
+            <a:lvl4pPr marL="1371600" algn="l" defTabSz="914400" rtl="0" eaLnBrk="1" latinLnBrk="0" hangingPunct="1">
+              <a:defRPr sz="1800" kern="1200">
+                <a:solidFill>
+                  <a:schemeClr val="lt1"/>
+                </a:solidFill>
+                <a:latin typeface="+mn-lt"/>
+                <a:ea typeface="+mn-ea"/>
+                <a:cs typeface="+mn-cs"/>
+              </a:defRPr>
+            </a:lvl4pPr>
+            <a:lvl5pPr marL="1828800" algn="l" defTabSz="914400" rtl="0" eaLnBrk="1" latinLnBrk="0" hangingPunct="1">
+              <a:defRPr sz="1800" kern="1200">
+                <a:solidFill>
+                  <a:schemeClr val="lt1"/>
+                </a:solidFill>
+                <a:latin typeface="+mn-lt"/>
+                <a:ea typeface="+mn-ea"/>
+                <a:cs typeface="+mn-cs"/>
+              </a:defRPr>
+            </a:lvl5pPr>
+            <a:lvl6pPr marL="2286000" algn="l" defTabSz="914400" rtl="0" eaLnBrk="1" latinLnBrk="0" hangingPunct="1">
+              <a:defRPr sz="1800" kern="1200">
+                <a:solidFill>
+                  <a:schemeClr val="lt1"/>
+                </a:solidFill>
+                <a:latin typeface="+mn-lt"/>
+                <a:ea typeface="+mn-ea"/>
+                <a:cs typeface="+mn-cs"/>
+              </a:defRPr>
+            </a:lvl6pPr>
+            <a:lvl7pPr marL="2743200" algn="l" defTabSz="914400" rtl="0" eaLnBrk="1" latinLnBrk="0" hangingPunct="1">
+              <a:defRPr sz="1800" kern="1200">
+                <a:solidFill>
+                  <a:schemeClr val="lt1"/>
+                </a:solidFill>
+                <a:latin typeface="+mn-lt"/>
+                <a:ea typeface="+mn-ea"/>
+                <a:cs typeface="+mn-cs"/>
+              </a:defRPr>
+            </a:lvl7pPr>
+            <a:lvl8pPr marL="3200400" algn="l" defTabSz="914400" rtl="0" eaLnBrk="1" latinLnBrk="0" hangingPunct="1">
+              <a:defRPr sz="1800" kern="1200">
+                <a:solidFill>
+                  <a:schemeClr val="lt1"/>
+                </a:solidFill>
+                <a:latin typeface="+mn-lt"/>
+                <a:ea typeface="+mn-ea"/>
+                <a:cs typeface="+mn-cs"/>
+              </a:defRPr>
+            </a:lvl8pPr>
+            <a:lvl9pPr marL="3657600" algn="l" defTabSz="914400" rtl="0" eaLnBrk="1" latinLnBrk="0" hangingPunct="1">
+              <a:defRPr sz="1800" kern="1200">
+                <a:solidFill>
+                  <a:schemeClr val="lt1"/>
+                </a:solidFill>
+                <a:latin typeface="+mn-lt"/>
+                <a:ea typeface="+mn-ea"/>
+                <a:cs typeface="+mn-cs"/>
+              </a:defRPr>
+            </a:lvl9pPr>
+          </a:lstStyle>
+          <a:p>
+            <a:pPr algn="ctr"/>
+            <a:endParaRPr lang="en-US"/>
+          </a:p>
+        </p:txBody>
+      </p:sp>
+      <p:grpSp>
+        <p:nvGrpSpPr>
+          <p:cNvPr id="7" name="Group 6">
+            <a:extLst>
+              <a:ext uri="{FF2B5EF4-FFF2-40B4-BE49-F238E27FC236}">
+                <a16:creationId xmlns:a16="http://schemas.microsoft.com/office/drawing/2014/main" id="{EADAB253-13A3-4D5E-2DD0-017E6F167F13}"/>
+              </a:ext>
+            </a:extLst>
+          </p:cNvPr>
+          <p:cNvGrpSpPr/>
+          <p:nvPr/>
+        </p:nvGrpSpPr>
+        <p:grpSpPr>
+          <a:xfrm>
+            <a:off x="3865537" y="1434491"/>
+            <a:ext cx="2848480" cy="1612641"/>
+            <a:chOff x="3865537" y="1434491"/>
+            <a:chExt cx="2848480" cy="1612641"/>
+          </a:xfrm>
+        </p:grpSpPr>
+        <p:pic>
+          <p:nvPicPr>
+            <p:cNvPr id="2" name="Picture 1">
+              <a:extLst>
+                <a:ext uri="{FF2B5EF4-FFF2-40B4-BE49-F238E27FC236}">
+                  <a16:creationId xmlns:a16="http://schemas.microsoft.com/office/drawing/2014/main" id="{77D56882-B39D-47D5-AACD-0ABF7ECE3E67}"/>
+                </a:ext>
+              </a:extLst>
+            </p:cNvPr>
+            <p:cNvPicPr>
+              <a:picLocks noChangeAspect="1"/>
+            </p:cNvPicPr>
+            <p:nvPr/>
+          </p:nvPicPr>
+          <p:blipFill rotWithShape="1">
+            <a:blip r:embed="rId4"/>
+            <a:srcRect r="39163"/>
+            <a:stretch/>
+          </p:blipFill>
+          <p:spPr>
+            <a:xfrm>
+              <a:off x="3865537" y="1434491"/>
+              <a:ext cx="2827817" cy="1612641"/>
+            </a:xfrm>
+            <a:prstGeom prst="rect">
+              <a:avLst/>
+            </a:prstGeom>
+          </p:spPr>
+        </p:pic>
+        <p:sp>
+          <p:nvSpPr>
+            <p:cNvPr id="3" name="Rectangle: Rounded Corners 2">
+              <a:extLst>
+                <a:ext uri="{FF2B5EF4-FFF2-40B4-BE49-F238E27FC236}">
+                  <a16:creationId xmlns:a16="http://schemas.microsoft.com/office/drawing/2014/main" id="{FE59D927-EDFE-4724-B097-B4603043B15F}"/>
+                </a:ext>
+              </a:extLst>
+            </p:cNvPr>
+            <p:cNvSpPr/>
+            <p:nvPr/>
+          </p:nvSpPr>
+          <p:spPr>
+            <a:xfrm>
+              <a:off x="4961417" y="1447800"/>
+              <a:ext cx="1752600" cy="1598464"/>
+            </a:xfrm>
+            <a:prstGeom prst="roundRect">
+              <a:avLst/>
+            </a:prstGeom>
+            <a:noFill/>
+            <a:ln w="38100" cap="flat" cmpd="sng" algn="ctr">
+              <a:solidFill>
+                <a:srgbClr val="C00000"/>
+              </a:solidFill>
+              <a:prstDash val="solid"/>
+              <a:round/>
+              <a:headEnd type="none" w="med" len="med"/>
+              <a:tailEnd type="none" w="med" len="med"/>
+            </a:ln>
+          </p:spPr>
+          <p:style>
+            <a:lnRef idx="0">
+              <a:scrgbClr r="0" g="0" b="0"/>
+            </a:lnRef>
+            <a:fillRef idx="0">
+              <a:scrgbClr r="0" g="0" b="0"/>
+            </a:fillRef>
+            <a:effectRef idx="0">
+              <a:scrgbClr r="0" g="0" b="0"/>
+            </a:effectRef>
+            <a:fontRef idx="minor">
+              <a:schemeClr val="accent2"/>
+            </a:fontRef>
+          </p:style>
+          <p:txBody>
+            <a:bodyPr rtlCol="0" anchor="ctr"/>
+            <a:lstStyle/>
+            <a:p>
+              <a:pPr algn="ctr"/>
+              <a:endParaRPr lang="en-US"/>
+            </a:p>
+          </p:txBody>
+        </p:sp>
+      </p:grpSp>
+      <p:sp>
+        <p:nvSpPr>
+          <p:cNvPr id="4" name="Speech Bubble: Rectangle with Corners Rounded 3">
+            <a:extLst>
+              <a:ext uri="{FF2B5EF4-FFF2-40B4-BE49-F238E27FC236}">
+                <a16:creationId xmlns:a16="http://schemas.microsoft.com/office/drawing/2014/main" id="{D10843E1-985B-4A9F-A87D-3ABA26727E55}"/>
+              </a:ext>
+            </a:extLst>
+          </p:cNvPr>
+          <p:cNvSpPr/>
+          <p:nvPr/>
+        </p:nvSpPr>
+        <p:spPr>
+          <a:xfrm>
+            <a:off x="6941004" y="2286513"/>
+            <a:ext cx="1581150" cy="279625"/>
+          </a:xfrm>
+          <a:prstGeom prst="wedgeRoundRectCallout">
+            <a:avLst>
+              <a:gd name="adj1" fmla="val -82617"/>
+              <a:gd name="adj2" fmla="val -71138"/>
+              <a:gd name="adj3" fmla="val 16667"/>
+            </a:avLst>
+          </a:prstGeom>
+        </p:spPr>
+        <p:style>
+          <a:lnRef idx="2">
+            <a:schemeClr val="accent6">
+              <a:shade val="15000"/>
+            </a:schemeClr>
+          </a:lnRef>
+          <a:fillRef idx="1">
+            <a:schemeClr val="accent6"/>
+          </a:fillRef>
+          <a:effectRef idx="0">
+            <a:schemeClr val="accent6"/>
+          </a:effectRef>
+          <a:fontRef idx="minor">
+            <a:schemeClr val="lt1"/>
+          </a:fontRef>
+        </p:style>
+        <p:txBody>
+          <a:bodyPr rtlCol="0" anchor="ctr"/>
+          <a:lstStyle/>
+          <a:p>
+            <a:pPr algn="ctr"/>
+            <a:r>
+              <a:rPr lang="en-US" sz="1400" b="1" dirty="0"/>
+              <a:t>Add constraints </a:t>
+            </a:r>
+          </a:p>
+        </p:txBody>
+      </p:sp>
+      <p:sp>
+        <p:nvSpPr>
+          <p:cNvPr id="8" name="Speech Bubble: Rectangle with Corners Rounded 7">
+            <a:extLst>
+              <a:ext uri="{FF2B5EF4-FFF2-40B4-BE49-F238E27FC236}">
+                <a16:creationId xmlns:a16="http://schemas.microsoft.com/office/drawing/2014/main" id="{250CFE54-A276-B0DE-6173-CFCFE03D114A}"/>
+              </a:ext>
+            </a:extLst>
+          </p:cNvPr>
+          <p:cNvSpPr/>
+          <p:nvPr/>
+        </p:nvSpPr>
+        <p:spPr>
+          <a:xfrm>
+            <a:off x="6941004" y="1524001"/>
+            <a:ext cx="1581150" cy="560276"/>
+          </a:xfrm>
+          <a:prstGeom prst="wedgeRoundRectCallout">
+            <a:avLst>
+              <a:gd name="adj1" fmla="val -86747"/>
+              <a:gd name="adj2" fmla="val 14507"/>
+              <a:gd name="adj3" fmla="val 16667"/>
+            </a:avLst>
+          </a:prstGeom>
+        </p:spPr>
+        <p:style>
+          <a:lnRef idx="2">
+            <a:schemeClr val="accent6">
+              <a:shade val="15000"/>
+            </a:schemeClr>
+          </a:lnRef>
+          <a:fillRef idx="1">
+            <a:schemeClr val="accent6"/>
+          </a:fillRef>
+          <a:effectRef idx="0">
+            <a:schemeClr val="accent6"/>
+          </a:effectRef>
+          <a:fontRef idx="minor">
+            <a:schemeClr val="lt1"/>
+          </a:fontRef>
+        </p:style>
+        <p:txBody>
+          <a:bodyPr rtlCol="0" anchor="ctr"/>
+          <a:lstStyle/>
+          <a:p>
+            <a:pPr algn="ctr"/>
+            <a:r>
+              <a:rPr lang="en-US" sz="1400" b="1" dirty="0"/>
+              <a:t>Work with partial solutions</a:t>
+            </a:r>
+          </a:p>
+        </p:txBody>
+      </p:sp>
+    </p:spTree>
+  </p:cSld>
+  <p:clrMapOvr>
+    <a:masterClrMapping/>
+  </p:clrMapOvr>
+  <p:timing>
+    <p:tnLst>
+      <p:par>
+        <p:cTn id="1" dur="indefinite" restart="never" nodeType="tmRoot">
+          <p:childTnLst>
+            <p:seq concurrent="1" nextAc="seek">
+              <p:cTn id="2" dur="indefinite" nodeType="mainSeq">
+                <p:childTnLst>
+                  <p:par>
+                    <p:cTn id="3" fill="hold">
+                      <p:stCondLst>
+                        <p:cond delay="indefinite"/>
+                        <p:cond evt="onBegin" delay="0">
+                          <p:tn val="2"/>
+                        </p:cond>
+                      </p:stCondLst>
+                      <p:childTnLst>
+                        <p:par>
+                          <p:cTn id="4" fill="hold">
+                            <p:stCondLst>
+                              <p:cond delay="0"/>
+                            </p:stCondLst>
+                            <p:childTnLst>
+                              <p:par>
+                                <p:cTn id="5" presetID="1" presetClass="entr" presetSubtype="0" fill="hold" grpId="0" nodeType="withEffect">
+                                  <p:stCondLst>
+                                    <p:cond delay="0"/>
+                                  </p:stCondLst>
+                                  <p:childTnLst>
+                                    <p:set>
+                                      <p:cBhvr>
+                                        <p:cTn id="6" dur="1" fill="hold">
+                                          <p:stCondLst>
+                                            <p:cond delay="0"/>
+                                          </p:stCondLst>
+                                        </p:cTn>
+                                        <p:tgtEl>
+                                          <p:spTgt spid="5123">
+                                            <p:txEl>
+                                              <p:pRg st="0" end="0"/>
+                                            </p:txEl>
+                                          </p:spTgt>
+                                        </p:tgtEl>
+                                        <p:attrNameLst>
+                                          <p:attrName>style.visibility</p:attrName>
+                                        </p:attrNameLst>
+                                      </p:cBhvr>
+                                      <p:to>
+                                        <p:strVal val="visible"/>
+                                      </p:to>
+                                    </p:set>
+                                  </p:childTnLst>
+                                </p:cTn>
+                              </p:par>
+                              <p:par>
+                                <p:cTn id="7" presetID="1" presetClass="entr" presetSubtype="0" fill="hold" grpId="0" nodeType="withEffect">
+                                  <p:stCondLst>
+                                    <p:cond delay="0"/>
+                                  </p:stCondLst>
+                                  <p:childTnLst>
+                                    <p:set>
+                                      <p:cBhvr>
+                                        <p:cTn id="8" dur="1" fill="hold">
+                                          <p:stCondLst>
+                                            <p:cond delay="0"/>
+                                          </p:stCondLst>
+                                        </p:cTn>
+                                        <p:tgtEl>
+                                          <p:spTgt spid="5123">
+                                            <p:txEl>
+                                              <p:pRg st="1" end="1"/>
+                                            </p:txEl>
+                                          </p:spTgt>
+                                        </p:tgtEl>
+                                        <p:attrNameLst>
+                                          <p:attrName>style.visibility</p:attrName>
+                                        </p:attrNameLst>
+                                      </p:cBhvr>
+                                      <p:to>
+                                        <p:strVal val="visible"/>
+                                      </p:to>
+                                    </p:set>
+                                  </p:childTnLst>
+                                </p:cTn>
+                              </p:par>
+                              <p:par>
+                                <p:cTn id="9" presetID="1" presetClass="entr" presetSubtype="0" fill="hold" grpId="0" nodeType="withEffect">
+                                  <p:stCondLst>
+                                    <p:cond delay="0"/>
+                                  </p:stCondLst>
+                                  <p:childTnLst>
+                                    <p:set>
+                                      <p:cBhvr>
+                                        <p:cTn id="10" dur="1" fill="hold">
+                                          <p:stCondLst>
+                                            <p:cond delay="0"/>
+                                          </p:stCondLst>
+                                        </p:cTn>
+                                        <p:tgtEl>
+                                          <p:spTgt spid="5123">
+                                            <p:txEl>
+                                              <p:pRg st="2" end="2"/>
+                                            </p:txEl>
+                                          </p:spTgt>
+                                        </p:tgtEl>
+                                        <p:attrNameLst>
+                                          <p:attrName>style.visibility</p:attrName>
+                                        </p:attrNameLst>
+                                      </p:cBhvr>
+                                      <p:to>
+                                        <p:strVal val="visible"/>
+                                      </p:to>
+                                    </p:set>
+                                  </p:childTnLst>
+                                </p:cTn>
+                              </p:par>
+                            </p:childTnLst>
+                          </p:cTn>
+                        </p:par>
+                      </p:childTnLst>
+                    </p:cTn>
+                  </p:par>
+                  <p:par>
+                    <p:cTn id="11" fill="hold">
+                      <p:stCondLst>
+                        <p:cond delay="indefinite"/>
+                      </p:stCondLst>
+                      <p:childTnLst>
+                        <p:par>
+                          <p:cTn id="12" fill="hold">
+                            <p:stCondLst>
+                              <p:cond delay="0"/>
+                            </p:stCondLst>
+                            <p:childTnLst>
+                              <p:par>
+                                <p:cTn id="13" presetID="1" presetClass="entr" presetSubtype="0" fill="hold" grpId="0" nodeType="clickEffect">
+                                  <p:stCondLst>
+                                    <p:cond delay="0"/>
+                                  </p:stCondLst>
+                                  <p:childTnLst>
+                                    <p:set>
+                                      <p:cBhvr>
+                                        <p:cTn id="14" dur="1" fill="hold">
+                                          <p:stCondLst>
+                                            <p:cond delay="0"/>
+                                          </p:stCondLst>
+                                        </p:cTn>
+                                        <p:tgtEl>
+                                          <p:spTgt spid="5123">
+                                            <p:txEl>
+                                              <p:pRg st="3" end="3"/>
+                                            </p:txEl>
+                                          </p:spTgt>
+                                        </p:tgtEl>
+                                        <p:attrNameLst>
+                                          <p:attrName>style.visibility</p:attrName>
+                                        </p:attrNameLst>
+                                      </p:cBhvr>
+                                      <p:to>
+                                        <p:strVal val="visible"/>
+                                      </p:to>
+                                    </p:set>
+                                  </p:childTnLst>
+                                </p:cTn>
+                              </p:par>
+                              <p:par>
+                                <p:cTn id="15" presetID="1" presetClass="entr" presetSubtype="0" fill="hold" grpId="0" nodeType="withEffect">
+                                  <p:stCondLst>
+                                    <p:cond delay="0"/>
+                                  </p:stCondLst>
+                                  <p:childTnLst>
+                                    <p:set>
+                                      <p:cBhvr>
+                                        <p:cTn id="16" dur="1" fill="hold">
+                                          <p:stCondLst>
+                                            <p:cond delay="0"/>
+                                          </p:stCondLst>
+                                        </p:cTn>
+                                        <p:tgtEl>
+                                          <p:spTgt spid="8"/>
+                                        </p:tgtEl>
+                                        <p:attrNameLst>
+                                          <p:attrName>style.visibility</p:attrName>
+                                        </p:attrNameLst>
+                                      </p:cBhvr>
+                                      <p:to>
+                                        <p:strVal val="visible"/>
+                                      </p:to>
+                                    </p:set>
+                                  </p:childTnLst>
+                                </p:cTn>
+                              </p:par>
+                            </p:childTnLst>
+                          </p:cTn>
+                        </p:par>
+                      </p:childTnLst>
+                    </p:cTn>
+                  </p:par>
+                  <p:par>
+                    <p:cTn id="17" fill="hold">
+                      <p:stCondLst>
+                        <p:cond delay="indefinite"/>
+                      </p:stCondLst>
+                      <p:childTnLst>
+                        <p:par>
+                          <p:cTn id="18" fill="hold">
+                            <p:stCondLst>
+                              <p:cond delay="0"/>
+                            </p:stCondLst>
+                            <p:childTnLst>
+                              <p:par>
+                                <p:cTn id="19" presetID="1" presetClass="entr" presetSubtype="0" fill="hold" grpId="0" nodeType="clickEffect">
+                                  <p:stCondLst>
+                                    <p:cond delay="0"/>
+                                  </p:stCondLst>
+                                  <p:childTnLst>
+                                    <p:set>
+                                      <p:cBhvr>
+                                        <p:cTn id="20" dur="1" fill="hold">
+                                          <p:stCondLst>
+                                            <p:cond delay="0"/>
+                                          </p:stCondLst>
+                                        </p:cTn>
+                                        <p:tgtEl>
+                                          <p:spTgt spid="5123">
+                                            <p:txEl>
+                                              <p:pRg st="4" end="4"/>
+                                            </p:txEl>
+                                          </p:spTgt>
+                                        </p:tgtEl>
+                                        <p:attrNameLst>
+                                          <p:attrName>style.visibility</p:attrName>
+                                        </p:attrNameLst>
+                                      </p:cBhvr>
+                                      <p:to>
+                                        <p:strVal val="visible"/>
+                                      </p:to>
+                                    </p:set>
+                                  </p:childTnLst>
+                                </p:cTn>
+                              </p:par>
+                              <p:par>
+                                <p:cTn id="21" presetID="1" presetClass="entr" presetSubtype="0" fill="hold" grpId="0" nodeType="withEffect">
+                                  <p:stCondLst>
+                                    <p:cond delay="0"/>
+                                  </p:stCondLst>
+                                  <p:childTnLst>
+                                    <p:set>
+                                      <p:cBhvr>
+                                        <p:cTn id="22" dur="1" fill="hold">
+                                          <p:stCondLst>
+                                            <p:cond delay="0"/>
+                                          </p:stCondLst>
+                                        </p:cTn>
+                                        <p:tgtEl>
+                                          <p:spTgt spid="4"/>
+                                        </p:tgtEl>
+                                        <p:attrNameLst>
+                                          <p:attrName>style.visibility</p:attrName>
+                                        </p:attrNameLst>
+                                      </p:cBhvr>
+                                      <p:to>
+                                        <p:strVal val="visible"/>
+                                      </p:to>
+                                    </p:set>
+                                  </p:childTnLst>
+                                </p:cTn>
+                              </p:par>
+                            </p:childTnLst>
+                          </p:cTn>
+                        </p:par>
+                      </p:childTnLst>
+                    </p:cTn>
+                  </p:par>
+                  <p:par>
+                    <p:cTn id="23" fill="hold">
+                      <p:stCondLst>
+                        <p:cond delay="indefinite"/>
+                      </p:stCondLst>
+                      <p:childTnLst>
+                        <p:par>
+                          <p:cTn id="24" fill="hold">
+                            <p:stCondLst>
+                              <p:cond delay="0"/>
+                            </p:stCondLst>
+                            <p:childTnLst>
+                              <p:par>
+                                <p:cTn id="25" presetID="1" presetClass="entr" presetSubtype="0" fill="hold" grpId="0" nodeType="clickEffect">
+                                  <p:stCondLst>
+                                    <p:cond delay="0"/>
+                                  </p:stCondLst>
+                                  <p:childTnLst>
+                                    <p:set>
+                                      <p:cBhvr>
+                                        <p:cTn id="26" dur="1" fill="hold">
+                                          <p:stCondLst>
+                                            <p:cond delay="0"/>
+                                          </p:stCondLst>
+                                        </p:cTn>
+                                        <p:tgtEl>
+                                          <p:spTgt spid="5123">
+                                            <p:txEl>
+                                              <p:pRg st="6" end="6"/>
+                                            </p:txEl>
+                                          </p:spTgt>
+                                        </p:tgtEl>
+                                        <p:attrNameLst>
+                                          <p:attrName>style.visibility</p:attrName>
+                                        </p:attrNameLst>
+                                      </p:cBhvr>
+                                      <p:to>
+                                        <p:strVal val="visible"/>
+                                      </p:to>
+                                    </p:set>
+                                  </p:childTnLst>
+                                </p:cTn>
+                              </p:par>
+                              <p:par>
+                                <p:cTn id="27" presetID="1" presetClass="entr" presetSubtype="0" fill="hold" grpId="0" nodeType="withEffect">
+                                  <p:stCondLst>
+                                    <p:cond delay="0"/>
+                                  </p:stCondLst>
+                                  <p:childTnLst>
+                                    <p:set>
+                                      <p:cBhvr>
+                                        <p:cTn id="28" dur="1" fill="hold">
+                                          <p:stCondLst>
+                                            <p:cond delay="0"/>
+                                          </p:stCondLst>
+                                        </p:cTn>
+                                        <p:tgtEl>
+                                          <p:spTgt spid="5123">
+                                            <p:txEl>
+                                              <p:pRg st="7" end="7"/>
+                                            </p:txEl>
+                                          </p:spTgt>
+                                        </p:tgtEl>
+                                        <p:attrNameLst>
+                                          <p:attrName>style.visibility</p:attrName>
+                                        </p:attrNameLst>
+                                      </p:cBhvr>
+                                      <p:to>
+                                        <p:strVal val="visible"/>
+                                      </p:to>
+                                    </p:set>
+                                  </p:childTnLst>
+                                </p:cTn>
+                              </p:par>
+                              <p:par>
+                                <p:cTn id="29" presetID="1" presetClass="entr" presetSubtype="0" fill="hold" grpId="0" nodeType="withEffect">
+                                  <p:stCondLst>
+                                    <p:cond delay="0"/>
+                                  </p:stCondLst>
+                                  <p:childTnLst>
+                                    <p:set>
+                                      <p:cBhvr>
+                                        <p:cTn id="30" dur="1" fill="hold">
+                                          <p:stCondLst>
+                                            <p:cond delay="0"/>
+                                          </p:stCondLst>
+                                        </p:cTn>
+                                        <p:tgtEl>
+                                          <p:spTgt spid="5123">
+                                            <p:txEl>
+                                              <p:pRg st="8" end="8"/>
+                                            </p:txEl>
+                                          </p:spTgt>
+                                        </p:tgtEl>
+                                        <p:attrNameLst>
+                                          <p:attrName>style.visibility</p:attrName>
+                                        </p:attrNameLst>
+                                      </p:cBhvr>
+                                      <p:to>
+                                        <p:strVal val="visible"/>
+                                      </p:to>
+                                    </p:set>
+                                  </p:childTnLst>
+                                </p:cTn>
+                              </p:par>
+                            </p:childTnLst>
+                          </p:cTn>
+                        </p:par>
+                      </p:childTnLst>
+                    </p:cTn>
+                  </p:par>
+                </p:childTnLst>
+              </p:cTn>
+              <p:prevCondLst>
+                <p:cond evt="onPrev" delay="0">
+                  <p:tgtEl>
+                    <p:sldTgt/>
+                  </p:tgtEl>
+                </p:cond>
+              </p:prevCondLst>
+              <p:nextCondLst>
+                <p:cond evt="onNext" delay="0">
+                  <p:tgtEl>
+                    <p:sldTgt/>
+                  </p:tgtEl>
+                </p:cond>
+              </p:nextCondLst>
+            </p:seq>
+          </p:childTnLst>
+        </p:cTn>
+      </p:par>
+    </p:tnLst>
+    <p:bldLst>
+      <p:bldP spid="5123" grpId="0" uiExpand="1" build="p"/>
+      <p:bldP spid="4" grpId="0" animBg="1"/>
+      <p:bldP spid="8" grpId="0" animBg="1"/>
+    </p:bldLst>
+  </p:timing>
+</p:sld>
+</file>
+
+<file path=ppt/slides/slide20.xml><?xml version="1.0" encoding="utf-8"?>
 <p:sld xmlns:a="http://schemas.openxmlformats.org/drawingml/2006/main" xmlns:r="http://schemas.openxmlformats.org/officeDocument/2006/relationships" xmlns:p="http://schemas.openxmlformats.org/presentationml/2006/main" show="0">
   <p:cSld>
     <p:spTree>
@@ -10284,1199 +11599,7 @@
 </p:sld>
 </file>
 
-<file path=ppt/slides/slide2.xml><?xml version="1.0" encoding="utf-8"?>
-<p:sld xmlns:a="http://schemas.openxmlformats.org/drawingml/2006/main" xmlns:r="http://schemas.openxmlformats.org/officeDocument/2006/relationships" xmlns:p="http://schemas.openxmlformats.org/presentationml/2006/main">
-  <p:cSld>
-    <p:spTree>
-      <p:nvGrpSpPr>
-        <p:cNvPr id="1" name=""/>
-        <p:cNvGrpSpPr/>
-        <p:nvPr/>
-      </p:nvGrpSpPr>
-      <p:grpSpPr>
-        <a:xfrm>
-          <a:off x="0" y="0"/>
-          <a:ext cx="0" cy="0"/>
-          <a:chOff x="0" y="0"/>
-          <a:chExt cx="0" cy="0"/>
-        </a:xfrm>
-      </p:grpSpPr>
-      <p:sp>
-        <p:nvSpPr>
-          <p:cNvPr id="5122" name="Rectangle 2"/>
-          <p:cNvSpPr>
-            <a:spLocks noGrp="1" noChangeArrowheads="1"/>
-          </p:cNvSpPr>
-          <p:nvPr>
-            <p:ph type="title"/>
-          </p:nvPr>
-        </p:nvSpPr>
-        <p:spPr/>
-        <p:txBody>
-          <a:bodyPr/>
-          <a:lstStyle/>
-          <a:p>
-            <a:r>
-              <a:rPr lang="en-US" sz="3200" dirty="0"/>
-              <a:t>Constraint Satisfaction Problems (CSPs)</a:t>
-            </a:r>
-          </a:p>
-        </p:txBody>
-      </p:sp>
-      <mc:AlternateContent xmlns:mc="http://schemas.openxmlformats.org/markup-compatibility/2006">
-        <mc:Choice xmlns:a14="http://schemas.microsoft.com/office/drawing/2010/main" Requires="a14">
-          <p:sp>
-            <p:nvSpPr>
-              <p:cNvPr id="5123" name="Rectangle 3"/>
-              <p:cNvSpPr>
-                <a:spLocks noGrp="1" noChangeArrowheads="1"/>
-              </p:cNvSpPr>
-              <p:nvPr>
-                <p:ph idx="1"/>
-              </p:nvPr>
-            </p:nvSpPr>
-            <p:spPr>
-              <a:xfrm>
-                <a:off x="628650" y="3048000"/>
-                <a:ext cx="8058150" cy="3444874"/>
-              </a:xfrm>
-            </p:spPr>
-            <p:txBody>
-              <a:bodyPr>
-                <a:normAutofit fontScale="92500" lnSpcReduction="10000"/>
-              </a:bodyPr>
-              <a:lstStyle/>
-              <a:p>
-                <a:pPr marL="0" indent="0">
-                  <a:buNone/>
-                </a:pPr>
-                <a:r>
-                  <a:rPr lang="en-US" sz="2000" dirty="0"/>
-                  <a:t>Definition:</a:t>
-                </a:r>
-              </a:p>
-              <a:p>
-                <a:pPr lvl="1"/>
-                <a:r>
-                  <a:rPr lang="en-US" sz="2000" b="1" dirty="0">
-                    <a:solidFill>
-                      <a:srgbClr val="CC0000"/>
-                    </a:solidFill>
-                  </a:rPr>
-                  <a:t>State</a:t>
-                </a:r>
-                <a:r>
-                  <a:rPr lang="en-US" sz="2000" dirty="0"/>
-                  <a:t> is defined by a factored state representation:</a:t>
-                </a:r>
-              </a:p>
-              <a:p>
-                <a:pPr lvl="2"/>
-                <a:r>
-                  <a:rPr lang="en-US" sz="1700" dirty="0"/>
-                  <a:t>A set of variables </a:t>
-                </a:r>
-                <a:r>
-                  <a:rPr lang="en-US" sz="1700" i="1" dirty="0"/>
-                  <a:t>X</a:t>
-                </a:r>
-                <a:r>
-                  <a:rPr lang="en-US" sz="1700" i="1" baseline="-25000" dirty="0"/>
-                  <a:t>i  </a:t>
-                </a:r>
-                <a:r>
-                  <a:rPr lang="en-US" sz="1700" dirty="0"/>
-                  <a:t>called  </a:t>
-                </a:r>
-                <a:r>
-                  <a:rPr lang="en-US" sz="1700" dirty="0" err="1"/>
-                  <a:t>fluents</a:t>
-                </a:r>
-                <a:r>
-                  <a:rPr lang="en-US" sz="1700" dirty="0"/>
-                  <a:t>.</a:t>
-                </a:r>
-              </a:p>
-              <a:p>
-                <a:pPr lvl="1"/>
-                <a:r>
-                  <a:rPr lang="en-US" sz="2100" b="1" dirty="0">
-                    <a:solidFill>
-                      <a:srgbClr val="CC0000"/>
-                    </a:solidFill>
-                  </a:rPr>
-                  <a:t>Partial Solution: </a:t>
-                </a:r>
-                <a:r>
-                  <a:rPr lang="en-US" sz="2000" dirty="0"/>
-                  <a:t>Each variable can have a value from domain </a:t>
-                </a:r>
-                <a:r>
-                  <a:rPr lang="en-US" sz="2000" i="1" dirty="0"/>
-                  <a:t>D</a:t>
-                </a:r>
-                <a:r>
-                  <a:rPr lang="en-US" sz="2000" i="1" baseline="-25000" dirty="0"/>
-                  <a:t>i  </a:t>
-                </a:r>
-                <a:r>
-                  <a:rPr lang="en-US" sz="2000" dirty="0"/>
-                  <a:t>or be </a:t>
-                </a:r>
-                <a:r>
-                  <a:rPr lang="en-US" sz="2100" b="1" dirty="0"/>
-                  <a:t>unassigned</a:t>
-                </a:r>
-                <a:r>
-                  <a:rPr lang="en-US" sz="2000" dirty="0"/>
-                  <a:t>.</a:t>
-                </a:r>
-                <a:endParaRPr lang="en-US" sz="2000" b="1" dirty="0">
-                  <a:solidFill>
-                    <a:srgbClr val="CC0000"/>
-                  </a:solidFill>
-                </a:endParaRPr>
-              </a:p>
-              <a:p>
-                <a:pPr lvl="1"/>
-                <a:r>
-                  <a:rPr lang="en-US" sz="2000" b="1" dirty="0">
-                    <a:solidFill>
-                      <a:srgbClr val="CC0000"/>
-                    </a:solidFill>
-                  </a:rPr>
-                  <a:t>Constraints </a:t>
-                </a:r>
-                <a:r>
-                  <a:rPr lang="en-US" sz="2000" dirty="0"/>
-                  <a:t>are a set of rules specifying allowable combinations of values for subsets of the variables.</a:t>
-                </a:r>
-                <a:br>
-                  <a:rPr lang="en-US" sz="2000" dirty="0"/>
-                </a:br>
-                <a:r>
-                  <a:rPr lang="en-US" sz="2000" dirty="0"/>
-                  <a:t>		E.g., </a:t>
-                </a:r>
-                <a14:m>
-                  <m:oMath xmlns:m="http://schemas.openxmlformats.org/officeDocument/2006/math">
-                    <m:sSub>
-                      <m:sSubPr>
-                        <m:ctrlPr>
-                          <a:rPr lang="en-US" sz="2000" b="0" i="1" smtClean="0">
-                            <a:latin typeface="Cambria Math" panose="02040503050406030204" pitchFamily="18" charset="0"/>
-                          </a:rPr>
-                        </m:ctrlPr>
-                      </m:sSubPr>
-                      <m:e>
-                        <m:r>
-                          <a:rPr lang="en-US" sz="2000" b="0" i="1" smtClean="0">
-                            <a:latin typeface="Cambria Math" panose="02040503050406030204" pitchFamily="18" charset="0"/>
-                          </a:rPr>
-                          <m:t>𝑋</m:t>
-                        </m:r>
-                      </m:e>
-                      <m:sub>
-                        <m:r>
-                          <a:rPr lang="en-US" sz="2000" b="0" i="1" smtClean="0">
-                            <a:latin typeface="Cambria Math" panose="02040503050406030204" pitchFamily="18" charset="0"/>
-                          </a:rPr>
-                          <m:t>1</m:t>
-                        </m:r>
-                      </m:sub>
-                    </m:sSub>
-                    <m:r>
-                      <a:rPr lang="en-US" sz="2000" b="0" i="1" smtClean="0">
-                        <a:latin typeface="Cambria Math" panose="02040503050406030204" pitchFamily="18" charset="0"/>
-                      </a:rPr>
-                      <m:t>=3</m:t>
-                    </m:r>
-                  </m:oMath>
-                </a14:m>
-                <a:r>
-                  <a:rPr lang="en-US" sz="2000" dirty="0"/>
-                  <a:t>, </a:t>
-                </a:r>
-                <a14:m>
-                  <m:oMath xmlns:m="http://schemas.openxmlformats.org/officeDocument/2006/math">
-                    <m:r>
-                      <a:rPr lang="en-US" sz="2000" i="1" dirty="0" smtClean="0">
-                        <a:latin typeface="Cambria Math" panose="02040503050406030204" pitchFamily="18" charset="0"/>
-                      </a:rPr>
-                      <m:t>𝑋</m:t>
-                    </m:r>
-                    <m:r>
-                      <a:rPr lang="en-US" sz="2000" i="1" baseline="-25000" dirty="0">
-                        <a:latin typeface="Cambria Math" panose="02040503050406030204" pitchFamily="18" charset="0"/>
-                      </a:rPr>
-                      <m:t>1 </m:t>
-                    </m:r>
-                    <m:r>
-                      <a:rPr lang="en-US" sz="2000" i="1" dirty="0" smtClean="0">
-                        <a:latin typeface="Cambria Math" panose="02040503050406030204" pitchFamily="18" charset="0"/>
-                        <a:ea typeface="Cambria Math" panose="02040503050406030204" pitchFamily="18" charset="0"/>
-                      </a:rPr>
-                      <m:t>≠</m:t>
-                    </m:r>
-                    <m:r>
-                      <a:rPr lang="en-US" sz="2000" i="1" dirty="0">
-                        <a:latin typeface="Cambria Math" panose="02040503050406030204" pitchFamily="18" charset="0"/>
-                      </a:rPr>
-                      <m:t> </m:t>
-                    </m:r>
-                    <m:r>
-                      <a:rPr lang="en-US" sz="2000" i="1" dirty="0">
-                        <a:latin typeface="Cambria Math" panose="02040503050406030204" pitchFamily="18" charset="0"/>
-                      </a:rPr>
-                      <m:t>𝑋</m:t>
-                    </m:r>
-                    <m:r>
-                      <a:rPr lang="en-US" sz="2000" i="1" baseline="-25000" dirty="0">
-                        <a:latin typeface="Cambria Math" panose="02040503050406030204" pitchFamily="18" charset="0"/>
-                      </a:rPr>
-                      <m:t>7</m:t>
-                    </m:r>
-                    <m:r>
-                      <a:rPr lang="en-US" sz="2000" i="1" dirty="0">
-                        <a:latin typeface="Cambria Math" panose="02040503050406030204" pitchFamily="18" charset="0"/>
-                      </a:rPr>
-                      <m:t> </m:t>
-                    </m:r>
-                  </m:oMath>
-                </a14:m>
-                <a:r>
-                  <a:rPr lang="en-US" sz="2000" dirty="0"/>
-                  <a:t>or </a:t>
-                </a:r>
-                <a14:m>
-                  <m:oMath xmlns:m="http://schemas.openxmlformats.org/officeDocument/2006/math">
-                    <m:r>
-                      <a:rPr lang="en-US" sz="2000" i="1" dirty="0" smtClean="0">
-                        <a:latin typeface="Cambria Math" panose="02040503050406030204" pitchFamily="18" charset="0"/>
-                      </a:rPr>
-                      <m:t>𝑋</m:t>
-                    </m:r>
-                    <m:r>
-                      <a:rPr lang="en-US" sz="2000" i="1" baseline="-25000" dirty="0">
-                        <a:latin typeface="Cambria Math" panose="02040503050406030204" pitchFamily="18" charset="0"/>
-                      </a:rPr>
-                      <m:t>2 </m:t>
-                    </m:r>
-                    <m:r>
-                      <a:rPr lang="en-US" sz="2000" i="1" dirty="0">
-                        <a:latin typeface="Cambria Math" panose="02040503050406030204" pitchFamily="18" charset="0"/>
-                      </a:rPr>
-                      <m:t>&gt; </m:t>
-                    </m:r>
-                    <m:r>
-                      <a:rPr lang="en-US" sz="2000" i="1" dirty="0">
-                        <a:latin typeface="Cambria Math" panose="02040503050406030204" pitchFamily="18" charset="0"/>
-                      </a:rPr>
-                      <m:t>𝑋</m:t>
-                    </m:r>
-                    <m:r>
-                      <a:rPr lang="en-US" sz="2000" i="1" baseline="-25000" dirty="0">
-                        <a:latin typeface="Cambria Math" panose="02040503050406030204" pitchFamily="18" charset="0"/>
-                      </a:rPr>
-                      <m:t>9 </m:t>
-                    </m:r>
-                    <m:r>
-                      <a:rPr lang="en-US" sz="2000" i="1" dirty="0">
-                        <a:latin typeface="Cambria Math" panose="02040503050406030204" pitchFamily="18" charset="0"/>
-                      </a:rPr>
-                      <m:t>+ 3</m:t>
-                    </m:r>
-                  </m:oMath>
-                </a14:m>
-                <a:endParaRPr lang="en-US" sz="2000" dirty="0"/>
-              </a:p>
-              <a:p>
-                <a:pPr lvl="1"/>
-                <a:endParaRPr lang="en-US" sz="2000" b="1" dirty="0">
-                  <a:solidFill>
-                    <a:srgbClr val="CC0000"/>
-                  </a:solidFill>
-                </a:endParaRPr>
-              </a:p>
-              <a:p>
-                <a:pPr lvl="1"/>
-                <a:r>
-                  <a:rPr lang="en-US" sz="2000" b="1" dirty="0">
-                    <a:solidFill>
-                      <a:srgbClr val="CC0000"/>
-                    </a:solidFill>
-                  </a:rPr>
-                  <a:t>Solution</a:t>
-                </a:r>
-                <a:r>
-                  <a:rPr lang="en-US" sz="2000" dirty="0"/>
-                  <a:t>: a state that is a</a:t>
-                </a:r>
-              </a:p>
-              <a:p>
-                <a:pPr marL="1028700" lvl="2" indent="-342900">
-                  <a:buFont typeface="+mj-lt"/>
-                  <a:buAutoNum type="alphaLcParenR"/>
-                </a:pPr>
-                <a:r>
-                  <a:rPr lang="en-US" sz="1800" b="1" dirty="0">
-                    <a:solidFill>
-                      <a:srgbClr val="C00000"/>
-                    </a:solidFill>
-                  </a:rPr>
-                  <a:t>Consistent assignment</a:t>
-                </a:r>
-                <a:r>
-                  <a:rPr lang="en-US" sz="1800" dirty="0"/>
-                  <a:t>: satisfies all constraints.</a:t>
-                </a:r>
-                <a:endParaRPr lang="en-US" sz="1800" dirty="0">
-                  <a:solidFill>
-                    <a:srgbClr val="FF0000"/>
-                  </a:solidFill>
-                </a:endParaRPr>
-              </a:p>
-              <a:p>
-                <a:pPr marL="1028700" lvl="2" indent="-342900">
-                  <a:buFont typeface="+mj-lt"/>
-                  <a:buAutoNum type="alphaLcParenR"/>
-                </a:pPr>
-                <a:r>
-                  <a:rPr lang="en-US" sz="1800" b="1" dirty="0">
-                    <a:solidFill>
-                      <a:srgbClr val="C00000"/>
-                    </a:solidFill>
-                  </a:rPr>
-                  <a:t>Complete assignment:</a:t>
-                </a:r>
-                <a:r>
-                  <a:rPr lang="en-US" sz="1800" dirty="0">
-                    <a:solidFill>
-                      <a:srgbClr val="FF0000"/>
-                    </a:solidFill>
-                  </a:rPr>
-                  <a:t> </a:t>
-                </a:r>
-                <a:r>
-                  <a:rPr lang="en-US" sz="1800" dirty="0"/>
-                  <a:t>assigns value to each variable.</a:t>
-                </a:r>
-              </a:p>
-            </p:txBody>
-          </p:sp>
-        </mc:Choice>
-        <mc:Fallback>
-          <p:sp>
-            <p:nvSpPr>
-              <p:cNvPr id="5123" name="Rectangle 3"/>
-              <p:cNvSpPr>
-                <a:spLocks noGrp="1" noRot="1" noChangeAspect="1" noMove="1" noResize="1" noEditPoints="1" noAdjustHandles="1" noChangeArrowheads="1" noChangeShapeType="1" noTextEdit="1"/>
-              </p:cNvSpPr>
-              <p:nvPr>
-                <p:ph idx="1"/>
-              </p:nvPr>
-            </p:nvSpPr>
-            <p:spPr>
-              <a:xfrm>
-                <a:off x="628650" y="3048000"/>
-                <a:ext cx="8058150" cy="3444874"/>
-              </a:xfrm>
-              <a:blipFill>
-                <a:blip r:embed="rId3"/>
-                <a:stretch>
-                  <a:fillRect l="-681" t="-2301"/>
-                </a:stretch>
-              </a:blipFill>
-            </p:spPr>
-            <p:txBody>
-              <a:bodyPr/>
-              <a:lstStyle/>
-              <a:p>
-                <a:r>
-                  <a:rPr lang="en-US">
-                    <a:noFill/>
-                  </a:rPr>
-                  <a:t> </a:t>
-                </a:r>
-              </a:p>
-            </p:txBody>
-          </p:sp>
-        </mc:Fallback>
-      </mc:AlternateContent>
-      <p:sp>
-        <p:nvSpPr>
-          <p:cNvPr id="5" name="Star: 5 Points 4">
-            <a:extLst>
-              <a:ext uri="{FF2B5EF4-FFF2-40B4-BE49-F238E27FC236}">
-                <a16:creationId xmlns:a16="http://schemas.microsoft.com/office/drawing/2014/main" id="{C991C4F9-0A76-FF1E-E481-8912EE1EE828}"/>
-              </a:ext>
-              <a:ext uri="{C183D7F6-B498-43B3-948B-1728B52AA6E4}">
-                <adec:decorative xmlns:adec="http://schemas.microsoft.com/office/drawing/2017/decorative" val="1"/>
-              </a:ext>
-            </a:extLst>
-          </p:cNvPr>
-          <p:cNvSpPr/>
-          <p:nvPr/>
-        </p:nvSpPr>
-        <p:spPr>
-          <a:xfrm>
-            <a:off x="8763000" y="129075"/>
-            <a:ext cx="247650" cy="244474"/>
-          </a:xfrm>
-          <a:prstGeom prst="star5">
-            <a:avLst/>
-          </a:prstGeom>
-        </p:spPr>
-        <p:style>
-          <a:lnRef idx="2">
-            <a:schemeClr val="accent2">
-              <a:shade val="50000"/>
-            </a:schemeClr>
-          </a:lnRef>
-          <a:fillRef idx="1">
-            <a:schemeClr val="accent2"/>
-          </a:fillRef>
-          <a:effectRef idx="0">
-            <a:schemeClr val="accent2"/>
-          </a:effectRef>
-          <a:fontRef idx="minor">
-            <a:schemeClr val="lt1"/>
-          </a:fontRef>
-        </p:style>
-        <p:txBody>
-          <a:bodyPr rtlCol="0" anchor="ctr"/>
-          <a:lstStyle>
-            <a:defPPr>
-              <a:defRPr lang="en-US"/>
-            </a:defPPr>
-            <a:lvl1pPr marL="0" algn="l" defTabSz="914400" rtl="0" eaLnBrk="1" latinLnBrk="0" hangingPunct="1">
-              <a:defRPr sz="1800" kern="1200">
-                <a:solidFill>
-                  <a:schemeClr val="lt1"/>
-                </a:solidFill>
-                <a:latin typeface="+mn-lt"/>
-                <a:ea typeface="+mn-ea"/>
-                <a:cs typeface="+mn-cs"/>
-              </a:defRPr>
-            </a:lvl1pPr>
-            <a:lvl2pPr marL="457200" algn="l" defTabSz="914400" rtl="0" eaLnBrk="1" latinLnBrk="0" hangingPunct="1">
-              <a:defRPr sz="1800" kern="1200">
-                <a:solidFill>
-                  <a:schemeClr val="lt1"/>
-                </a:solidFill>
-                <a:latin typeface="+mn-lt"/>
-                <a:ea typeface="+mn-ea"/>
-                <a:cs typeface="+mn-cs"/>
-              </a:defRPr>
-            </a:lvl2pPr>
-            <a:lvl3pPr marL="914400" algn="l" defTabSz="914400" rtl="0" eaLnBrk="1" latinLnBrk="0" hangingPunct="1">
-              <a:defRPr sz="1800" kern="1200">
-                <a:solidFill>
-                  <a:schemeClr val="lt1"/>
-                </a:solidFill>
-                <a:latin typeface="+mn-lt"/>
-                <a:ea typeface="+mn-ea"/>
-                <a:cs typeface="+mn-cs"/>
-              </a:defRPr>
-            </a:lvl3pPr>
-            <a:lvl4pPr marL="1371600" algn="l" defTabSz="914400" rtl="0" eaLnBrk="1" latinLnBrk="0" hangingPunct="1">
-              <a:defRPr sz="1800" kern="1200">
-                <a:solidFill>
-                  <a:schemeClr val="lt1"/>
-                </a:solidFill>
-                <a:latin typeface="+mn-lt"/>
-                <a:ea typeface="+mn-ea"/>
-                <a:cs typeface="+mn-cs"/>
-              </a:defRPr>
-            </a:lvl4pPr>
-            <a:lvl5pPr marL="1828800" algn="l" defTabSz="914400" rtl="0" eaLnBrk="1" latinLnBrk="0" hangingPunct="1">
-              <a:defRPr sz="1800" kern="1200">
-                <a:solidFill>
-                  <a:schemeClr val="lt1"/>
-                </a:solidFill>
-                <a:latin typeface="+mn-lt"/>
-                <a:ea typeface="+mn-ea"/>
-                <a:cs typeface="+mn-cs"/>
-              </a:defRPr>
-            </a:lvl5pPr>
-            <a:lvl6pPr marL="2286000" algn="l" defTabSz="914400" rtl="0" eaLnBrk="1" latinLnBrk="0" hangingPunct="1">
-              <a:defRPr sz="1800" kern="1200">
-                <a:solidFill>
-                  <a:schemeClr val="lt1"/>
-                </a:solidFill>
-                <a:latin typeface="+mn-lt"/>
-                <a:ea typeface="+mn-ea"/>
-                <a:cs typeface="+mn-cs"/>
-              </a:defRPr>
-            </a:lvl6pPr>
-            <a:lvl7pPr marL="2743200" algn="l" defTabSz="914400" rtl="0" eaLnBrk="1" latinLnBrk="0" hangingPunct="1">
-              <a:defRPr sz="1800" kern="1200">
-                <a:solidFill>
-                  <a:schemeClr val="lt1"/>
-                </a:solidFill>
-                <a:latin typeface="+mn-lt"/>
-                <a:ea typeface="+mn-ea"/>
-                <a:cs typeface="+mn-cs"/>
-              </a:defRPr>
-            </a:lvl7pPr>
-            <a:lvl8pPr marL="3200400" algn="l" defTabSz="914400" rtl="0" eaLnBrk="1" latinLnBrk="0" hangingPunct="1">
-              <a:defRPr sz="1800" kern="1200">
-                <a:solidFill>
-                  <a:schemeClr val="lt1"/>
-                </a:solidFill>
-                <a:latin typeface="+mn-lt"/>
-                <a:ea typeface="+mn-ea"/>
-                <a:cs typeface="+mn-cs"/>
-              </a:defRPr>
-            </a:lvl8pPr>
-            <a:lvl9pPr marL="3657600" algn="l" defTabSz="914400" rtl="0" eaLnBrk="1" latinLnBrk="0" hangingPunct="1">
-              <a:defRPr sz="1800" kern="1200">
-                <a:solidFill>
-                  <a:schemeClr val="lt1"/>
-                </a:solidFill>
-                <a:latin typeface="+mn-lt"/>
-                <a:ea typeface="+mn-ea"/>
-                <a:cs typeface="+mn-cs"/>
-              </a:defRPr>
-            </a:lvl9pPr>
-          </a:lstStyle>
-          <a:p>
-            <a:pPr algn="ctr"/>
-            <a:endParaRPr lang="en-US"/>
-          </a:p>
-        </p:txBody>
-      </p:sp>
-      <p:grpSp>
-        <p:nvGrpSpPr>
-          <p:cNvPr id="7" name="Group 6">
-            <a:extLst>
-              <a:ext uri="{FF2B5EF4-FFF2-40B4-BE49-F238E27FC236}">
-                <a16:creationId xmlns:a16="http://schemas.microsoft.com/office/drawing/2014/main" id="{EADAB253-13A3-4D5E-2DD0-017E6F167F13}"/>
-              </a:ext>
-            </a:extLst>
-          </p:cNvPr>
-          <p:cNvGrpSpPr/>
-          <p:nvPr/>
-        </p:nvGrpSpPr>
-        <p:grpSpPr>
-          <a:xfrm>
-            <a:off x="3865537" y="1434491"/>
-            <a:ext cx="2848480" cy="1612641"/>
-            <a:chOff x="3865537" y="1434491"/>
-            <a:chExt cx="2848480" cy="1612641"/>
-          </a:xfrm>
-        </p:grpSpPr>
-        <p:pic>
-          <p:nvPicPr>
-            <p:cNvPr id="2" name="Picture 1">
-              <a:extLst>
-                <a:ext uri="{FF2B5EF4-FFF2-40B4-BE49-F238E27FC236}">
-                  <a16:creationId xmlns:a16="http://schemas.microsoft.com/office/drawing/2014/main" id="{77D56882-B39D-47D5-AACD-0ABF7ECE3E67}"/>
-                </a:ext>
-              </a:extLst>
-            </p:cNvPr>
-            <p:cNvPicPr>
-              <a:picLocks noChangeAspect="1"/>
-            </p:cNvPicPr>
-            <p:nvPr/>
-          </p:nvPicPr>
-          <p:blipFill rotWithShape="1">
-            <a:blip r:embed="rId4"/>
-            <a:srcRect r="39163"/>
-            <a:stretch/>
-          </p:blipFill>
-          <p:spPr>
-            <a:xfrm>
-              <a:off x="3865537" y="1434491"/>
-              <a:ext cx="2827817" cy="1612641"/>
-            </a:xfrm>
-            <a:prstGeom prst="rect">
-              <a:avLst/>
-            </a:prstGeom>
-          </p:spPr>
-        </p:pic>
-        <p:sp>
-          <p:nvSpPr>
-            <p:cNvPr id="3" name="Rectangle: Rounded Corners 2">
-              <a:extLst>
-                <a:ext uri="{FF2B5EF4-FFF2-40B4-BE49-F238E27FC236}">
-                  <a16:creationId xmlns:a16="http://schemas.microsoft.com/office/drawing/2014/main" id="{FE59D927-EDFE-4724-B097-B4603043B15F}"/>
-                </a:ext>
-              </a:extLst>
-            </p:cNvPr>
-            <p:cNvSpPr/>
-            <p:nvPr/>
-          </p:nvSpPr>
-          <p:spPr>
-            <a:xfrm>
-              <a:off x="4961417" y="1447800"/>
-              <a:ext cx="1752600" cy="1598464"/>
-            </a:xfrm>
-            <a:prstGeom prst="roundRect">
-              <a:avLst/>
-            </a:prstGeom>
-            <a:noFill/>
-            <a:ln w="38100" cap="flat" cmpd="sng" algn="ctr">
-              <a:solidFill>
-                <a:srgbClr val="C00000"/>
-              </a:solidFill>
-              <a:prstDash val="solid"/>
-              <a:round/>
-              <a:headEnd type="none" w="med" len="med"/>
-              <a:tailEnd type="none" w="med" len="med"/>
-            </a:ln>
-          </p:spPr>
-          <p:style>
-            <a:lnRef idx="0">
-              <a:scrgbClr r="0" g="0" b="0"/>
-            </a:lnRef>
-            <a:fillRef idx="0">
-              <a:scrgbClr r="0" g="0" b="0"/>
-            </a:fillRef>
-            <a:effectRef idx="0">
-              <a:scrgbClr r="0" g="0" b="0"/>
-            </a:effectRef>
-            <a:fontRef idx="minor">
-              <a:schemeClr val="accent2"/>
-            </a:fontRef>
-          </p:style>
-          <p:txBody>
-            <a:bodyPr rtlCol="0" anchor="ctr"/>
-            <a:lstStyle/>
-            <a:p>
-              <a:pPr algn="ctr"/>
-              <a:endParaRPr lang="en-US"/>
-            </a:p>
-          </p:txBody>
-        </p:sp>
-      </p:grpSp>
-      <p:sp>
-        <p:nvSpPr>
-          <p:cNvPr id="4" name="Speech Bubble: Rectangle with Corners Rounded 3">
-            <a:extLst>
-              <a:ext uri="{FF2B5EF4-FFF2-40B4-BE49-F238E27FC236}">
-                <a16:creationId xmlns:a16="http://schemas.microsoft.com/office/drawing/2014/main" id="{D10843E1-985B-4A9F-A87D-3ABA26727E55}"/>
-              </a:ext>
-            </a:extLst>
-          </p:cNvPr>
-          <p:cNvSpPr/>
-          <p:nvPr/>
-        </p:nvSpPr>
-        <p:spPr>
-          <a:xfrm>
-            <a:off x="6941004" y="2286513"/>
-            <a:ext cx="1581150" cy="279625"/>
-          </a:xfrm>
-          <a:prstGeom prst="wedgeRoundRectCallout">
-            <a:avLst>
-              <a:gd name="adj1" fmla="val -82617"/>
-              <a:gd name="adj2" fmla="val -71138"/>
-              <a:gd name="adj3" fmla="val 16667"/>
-            </a:avLst>
-          </a:prstGeom>
-        </p:spPr>
-        <p:style>
-          <a:lnRef idx="2">
-            <a:schemeClr val="accent6">
-              <a:shade val="15000"/>
-            </a:schemeClr>
-          </a:lnRef>
-          <a:fillRef idx="1">
-            <a:schemeClr val="accent6"/>
-          </a:fillRef>
-          <a:effectRef idx="0">
-            <a:schemeClr val="accent6"/>
-          </a:effectRef>
-          <a:fontRef idx="minor">
-            <a:schemeClr val="lt1"/>
-          </a:fontRef>
-        </p:style>
-        <p:txBody>
-          <a:bodyPr rtlCol="0" anchor="ctr"/>
-          <a:lstStyle/>
-          <a:p>
-            <a:pPr algn="ctr"/>
-            <a:r>
-              <a:rPr lang="en-US" sz="1400" b="1" dirty="0"/>
-              <a:t>Add constraints </a:t>
-            </a:r>
-          </a:p>
-        </p:txBody>
-      </p:sp>
-      <p:sp>
-        <p:nvSpPr>
-          <p:cNvPr id="8" name="Speech Bubble: Rectangle with Corners Rounded 7">
-            <a:extLst>
-              <a:ext uri="{FF2B5EF4-FFF2-40B4-BE49-F238E27FC236}">
-                <a16:creationId xmlns:a16="http://schemas.microsoft.com/office/drawing/2014/main" id="{250CFE54-A276-B0DE-6173-CFCFE03D114A}"/>
-              </a:ext>
-            </a:extLst>
-          </p:cNvPr>
-          <p:cNvSpPr/>
-          <p:nvPr/>
-        </p:nvSpPr>
-        <p:spPr>
-          <a:xfrm>
-            <a:off x="6941004" y="1524001"/>
-            <a:ext cx="1581150" cy="560276"/>
-          </a:xfrm>
-          <a:prstGeom prst="wedgeRoundRectCallout">
-            <a:avLst>
-              <a:gd name="adj1" fmla="val -86747"/>
-              <a:gd name="adj2" fmla="val 14507"/>
-              <a:gd name="adj3" fmla="val 16667"/>
-            </a:avLst>
-          </a:prstGeom>
-        </p:spPr>
-        <p:style>
-          <a:lnRef idx="2">
-            <a:schemeClr val="accent6">
-              <a:shade val="15000"/>
-            </a:schemeClr>
-          </a:lnRef>
-          <a:fillRef idx="1">
-            <a:schemeClr val="accent6"/>
-          </a:fillRef>
-          <a:effectRef idx="0">
-            <a:schemeClr val="accent6"/>
-          </a:effectRef>
-          <a:fontRef idx="minor">
-            <a:schemeClr val="lt1"/>
-          </a:fontRef>
-        </p:style>
-        <p:txBody>
-          <a:bodyPr rtlCol="0" anchor="ctr"/>
-          <a:lstStyle/>
-          <a:p>
-            <a:pPr algn="ctr"/>
-            <a:r>
-              <a:rPr lang="en-US" sz="1400" b="1" dirty="0"/>
-              <a:t>Work with partial solutions</a:t>
-            </a:r>
-          </a:p>
-        </p:txBody>
-      </p:sp>
-    </p:spTree>
-  </p:cSld>
-  <p:clrMapOvr>
-    <a:masterClrMapping/>
-  </p:clrMapOvr>
-  <p:timing>
-    <p:tnLst>
-      <p:par>
-        <p:cTn id="1" dur="indefinite" restart="never" nodeType="tmRoot">
-          <p:childTnLst>
-            <p:seq concurrent="1" nextAc="seek">
-              <p:cTn id="2" dur="indefinite" nodeType="mainSeq">
-                <p:childTnLst>
-                  <p:par>
-                    <p:cTn id="3" fill="hold">
-                      <p:stCondLst>
-                        <p:cond delay="indefinite"/>
-                        <p:cond evt="onBegin" delay="0">
-                          <p:tn val="2"/>
-                        </p:cond>
-                      </p:stCondLst>
-                      <p:childTnLst>
-                        <p:par>
-                          <p:cTn id="4" fill="hold">
-                            <p:stCondLst>
-                              <p:cond delay="0"/>
-                            </p:stCondLst>
-                            <p:childTnLst>
-                              <p:par>
-                                <p:cTn id="5" presetID="1" presetClass="entr" presetSubtype="0" fill="hold" grpId="0" nodeType="withEffect">
-                                  <p:stCondLst>
-                                    <p:cond delay="0"/>
-                                  </p:stCondLst>
-                                  <p:childTnLst>
-                                    <p:set>
-                                      <p:cBhvr>
-                                        <p:cTn id="6" dur="1" fill="hold">
-                                          <p:stCondLst>
-                                            <p:cond delay="0"/>
-                                          </p:stCondLst>
-                                        </p:cTn>
-                                        <p:tgtEl>
-                                          <p:spTgt spid="5123">
-                                            <p:txEl>
-                                              <p:pRg st="0" end="0"/>
-                                            </p:txEl>
-                                          </p:spTgt>
-                                        </p:tgtEl>
-                                        <p:attrNameLst>
-                                          <p:attrName>style.visibility</p:attrName>
-                                        </p:attrNameLst>
-                                      </p:cBhvr>
-                                      <p:to>
-                                        <p:strVal val="visible"/>
-                                      </p:to>
-                                    </p:set>
-                                  </p:childTnLst>
-                                </p:cTn>
-                              </p:par>
-                              <p:par>
-                                <p:cTn id="7" presetID="1" presetClass="entr" presetSubtype="0" fill="hold" grpId="0" nodeType="withEffect">
-                                  <p:stCondLst>
-                                    <p:cond delay="0"/>
-                                  </p:stCondLst>
-                                  <p:childTnLst>
-                                    <p:set>
-                                      <p:cBhvr>
-                                        <p:cTn id="8" dur="1" fill="hold">
-                                          <p:stCondLst>
-                                            <p:cond delay="0"/>
-                                          </p:stCondLst>
-                                        </p:cTn>
-                                        <p:tgtEl>
-                                          <p:spTgt spid="5123">
-                                            <p:txEl>
-                                              <p:pRg st="1" end="1"/>
-                                            </p:txEl>
-                                          </p:spTgt>
-                                        </p:tgtEl>
-                                        <p:attrNameLst>
-                                          <p:attrName>style.visibility</p:attrName>
-                                        </p:attrNameLst>
-                                      </p:cBhvr>
-                                      <p:to>
-                                        <p:strVal val="visible"/>
-                                      </p:to>
-                                    </p:set>
-                                  </p:childTnLst>
-                                </p:cTn>
-                              </p:par>
-                              <p:par>
-                                <p:cTn id="9" presetID="1" presetClass="entr" presetSubtype="0" fill="hold" grpId="0" nodeType="withEffect">
-                                  <p:stCondLst>
-                                    <p:cond delay="0"/>
-                                  </p:stCondLst>
-                                  <p:childTnLst>
-                                    <p:set>
-                                      <p:cBhvr>
-                                        <p:cTn id="10" dur="1" fill="hold">
-                                          <p:stCondLst>
-                                            <p:cond delay="0"/>
-                                          </p:stCondLst>
-                                        </p:cTn>
-                                        <p:tgtEl>
-                                          <p:spTgt spid="5123">
-                                            <p:txEl>
-                                              <p:pRg st="2" end="2"/>
-                                            </p:txEl>
-                                          </p:spTgt>
-                                        </p:tgtEl>
-                                        <p:attrNameLst>
-                                          <p:attrName>style.visibility</p:attrName>
-                                        </p:attrNameLst>
-                                      </p:cBhvr>
-                                      <p:to>
-                                        <p:strVal val="visible"/>
-                                      </p:to>
-                                    </p:set>
-                                  </p:childTnLst>
-                                </p:cTn>
-                              </p:par>
-                            </p:childTnLst>
-                          </p:cTn>
-                        </p:par>
-                      </p:childTnLst>
-                    </p:cTn>
-                  </p:par>
-                  <p:par>
-                    <p:cTn id="11" fill="hold">
-                      <p:stCondLst>
-                        <p:cond delay="indefinite"/>
-                      </p:stCondLst>
-                      <p:childTnLst>
-                        <p:par>
-                          <p:cTn id="12" fill="hold">
-                            <p:stCondLst>
-                              <p:cond delay="0"/>
-                            </p:stCondLst>
-                            <p:childTnLst>
-                              <p:par>
-                                <p:cTn id="13" presetID="1" presetClass="entr" presetSubtype="0" fill="hold" grpId="0" nodeType="clickEffect">
-                                  <p:stCondLst>
-                                    <p:cond delay="0"/>
-                                  </p:stCondLst>
-                                  <p:childTnLst>
-                                    <p:set>
-                                      <p:cBhvr>
-                                        <p:cTn id="14" dur="1" fill="hold">
-                                          <p:stCondLst>
-                                            <p:cond delay="0"/>
-                                          </p:stCondLst>
-                                        </p:cTn>
-                                        <p:tgtEl>
-                                          <p:spTgt spid="5123">
-                                            <p:txEl>
-                                              <p:pRg st="3" end="3"/>
-                                            </p:txEl>
-                                          </p:spTgt>
-                                        </p:tgtEl>
-                                        <p:attrNameLst>
-                                          <p:attrName>style.visibility</p:attrName>
-                                        </p:attrNameLst>
-                                      </p:cBhvr>
-                                      <p:to>
-                                        <p:strVal val="visible"/>
-                                      </p:to>
-                                    </p:set>
-                                  </p:childTnLst>
-                                </p:cTn>
-                              </p:par>
-                              <p:par>
-                                <p:cTn id="15" presetID="1" presetClass="entr" presetSubtype="0" fill="hold" grpId="0" nodeType="withEffect">
-                                  <p:stCondLst>
-                                    <p:cond delay="0"/>
-                                  </p:stCondLst>
-                                  <p:childTnLst>
-                                    <p:set>
-                                      <p:cBhvr>
-                                        <p:cTn id="16" dur="1" fill="hold">
-                                          <p:stCondLst>
-                                            <p:cond delay="0"/>
-                                          </p:stCondLst>
-                                        </p:cTn>
-                                        <p:tgtEl>
-                                          <p:spTgt spid="8"/>
-                                        </p:tgtEl>
-                                        <p:attrNameLst>
-                                          <p:attrName>style.visibility</p:attrName>
-                                        </p:attrNameLst>
-                                      </p:cBhvr>
-                                      <p:to>
-                                        <p:strVal val="visible"/>
-                                      </p:to>
-                                    </p:set>
-                                  </p:childTnLst>
-                                </p:cTn>
-                              </p:par>
-                            </p:childTnLst>
-                          </p:cTn>
-                        </p:par>
-                      </p:childTnLst>
-                    </p:cTn>
-                  </p:par>
-                  <p:par>
-                    <p:cTn id="17" fill="hold">
-                      <p:stCondLst>
-                        <p:cond delay="indefinite"/>
-                      </p:stCondLst>
-                      <p:childTnLst>
-                        <p:par>
-                          <p:cTn id="18" fill="hold">
-                            <p:stCondLst>
-                              <p:cond delay="0"/>
-                            </p:stCondLst>
-                            <p:childTnLst>
-                              <p:par>
-                                <p:cTn id="19" presetID="1" presetClass="entr" presetSubtype="0" fill="hold" grpId="0" nodeType="clickEffect">
-                                  <p:stCondLst>
-                                    <p:cond delay="0"/>
-                                  </p:stCondLst>
-                                  <p:childTnLst>
-                                    <p:set>
-                                      <p:cBhvr>
-                                        <p:cTn id="20" dur="1" fill="hold">
-                                          <p:stCondLst>
-                                            <p:cond delay="0"/>
-                                          </p:stCondLst>
-                                        </p:cTn>
-                                        <p:tgtEl>
-                                          <p:spTgt spid="5123">
-                                            <p:txEl>
-                                              <p:pRg st="4" end="4"/>
-                                            </p:txEl>
-                                          </p:spTgt>
-                                        </p:tgtEl>
-                                        <p:attrNameLst>
-                                          <p:attrName>style.visibility</p:attrName>
-                                        </p:attrNameLst>
-                                      </p:cBhvr>
-                                      <p:to>
-                                        <p:strVal val="visible"/>
-                                      </p:to>
-                                    </p:set>
-                                  </p:childTnLst>
-                                </p:cTn>
-                              </p:par>
-                              <p:par>
-                                <p:cTn id="21" presetID="1" presetClass="entr" presetSubtype="0" fill="hold" grpId="0" nodeType="withEffect">
-                                  <p:stCondLst>
-                                    <p:cond delay="0"/>
-                                  </p:stCondLst>
-                                  <p:childTnLst>
-                                    <p:set>
-                                      <p:cBhvr>
-                                        <p:cTn id="22" dur="1" fill="hold">
-                                          <p:stCondLst>
-                                            <p:cond delay="0"/>
-                                          </p:stCondLst>
-                                        </p:cTn>
-                                        <p:tgtEl>
-                                          <p:spTgt spid="4"/>
-                                        </p:tgtEl>
-                                        <p:attrNameLst>
-                                          <p:attrName>style.visibility</p:attrName>
-                                        </p:attrNameLst>
-                                      </p:cBhvr>
-                                      <p:to>
-                                        <p:strVal val="visible"/>
-                                      </p:to>
-                                    </p:set>
-                                  </p:childTnLst>
-                                </p:cTn>
-                              </p:par>
-                            </p:childTnLst>
-                          </p:cTn>
-                        </p:par>
-                      </p:childTnLst>
-                    </p:cTn>
-                  </p:par>
-                  <p:par>
-                    <p:cTn id="23" fill="hold">
-                      <p:stCondLst>
-                        <p:cond delay="indefinite"/>
-                      </p:stCondLst>
-                      <p:childTnLst>
-                        <p:par>
-                          <p:cTn id="24" fill="hold">
-                            <p:stCondLst>
-                              <p:cond delay="0"/>
-                            </p:stCondLst>
-                            <p:childTnLst>
-                              <p:par>
-                                <p:cTn id="25" presetID="1" presetClass="entr" presetSubtype="0" fill="hold" grpId="0" nodeType="clickEffect">
-                                  <p:stCondLst>
-                                    <p:cond delay="0"/>
-                                  </p:stCondLst>
-                                  <p:childTnLst>
-                                    <p:set>
-                                      <p:cBhvr>
-                                        <p:cTn id="26" dur="1" fill="hold">
-                                          <p:stCondLst>
-                                            <p:cond delay="0"/>
-                                          </p:stCondLst>
-                                        </p:cTn>
-                                        <p:tgtEl>
-                                          <p:spTgt spid="5123">
-                                            <p:txEl>
-                                              <p:pRg st="6" end="6"/>
-                                            </p:txEl>
-                                          </p:spTgt>
-                                        </p:tgtEl>
-                                        <p:attrNameLst>
-                                          <p:attrName>style.visibility</p:attrName>
-                                        </p:attrNameLst>
-                                      </p:cBhvr>
-                                      <p:to>
-                                        <p:strVal val="visible"/>
-                                      </p:to>
-                                    </p:set>
-                                  </p:childTnLst>
-                                </p:cTn>
-                              </p:par>
-                              <p:par>
-                                <p:cTn id="27" presetID="1" presetClass="entr" presetSubtype="0" fill="hold" grpId="0" nodeType="withEffect">
-                                  <p:stCondLst>
-                                    <p:cond delay="0"/>
-                                  </p:stCondLst>
-                                  <p:childTnLst>
-                                    <p:set>
-                                      <p:cBhvr>
-                                        <p:cTn id="28" dur="1" fill="hold">
-                                          <p:stCondLst>
-                                            <p:cond delay="0"/>
-                                          </p:stCondLst>
-                                        </p:cTn>
-                                        <p:tgtEl>
-                                          <p:spTgt spid="5123">
-                                            <p:txEl>
-                                              <p:pRg st="7" end="7"/>
-                                            </p:txEl>
-                                          </p:spTgt>
-                                        </p:tgtEl>
-                                        <p:attrNameLst>
-                                          <p:attrName>style.visibility</p:attrName>
-                                        </p:attrNameLst>
-                                      </p:cBhvr>
-                                      <p:to>
-                                        <p:strVal val="visible"/>
-                                      </p:to>
-                                    </p:set>
-                                  </p:childTnLst>
-                                </p:cTn>
-                              </p:par>
-                              <p:par>
-                                <p:cTn id="29" presetID="1" presetClass="entr" presetSubtype="0" fill="hold" grpId="0" nodeType="withEffect">
-                                  <p:stCondLst>
-                                    <p:cond delay="0"/>
-                                  </p:stCondLst>
-                                  <p:childTnLst>
-                                    <p:set>
-                                      <p:cBhvr>
-                                        <p:cTn id="30" dur="1" fill="hold">
-                                          <p:stCondLst>
-                                            <p:cond delay="0"/>
-                                          </p:stCondLst>
-                                        </p:cTn>
-                                        <p:tgtEl>
-                                          <p:spTgt spid="5123">
-                                            <p:txEl>
-                                              <p:pRg st="8" end="8"/>
-                                            </p:txEl>
-                                          </p:spTgt>
-                                        </p:tgtEl>
-                                        <p:attrNameLst>
-                                          <p:attrName>style.visibility</p:attrName>
-                                        </p:attrNameLst>
-                                      </p:cBhvr>
-                                      <p:to>
-                                        <p:strVal val="visible"/>
-                                      </p:to>
-                                    </p:set>
-                                  </p:childTnLst>
-                                </p:cTn>
-                              </p:par>
-                            </p:childTnLst>
-                          </p:cTn>
-                        </p:par>
-                      </p:childTnLst>
-                    </p:cTn>
-                  </p:par>
-                </p:childTnLst>
-              </p:cTn>
-              <p:prevCondLst>
-                <p:cond evt="onPrev" delay="0">
-                  <p:tgtEl>
-                    <p:sldTgt/>
-                  </p:tgtEl>
-                </p:cond>
-              </p:prevCondLst>
-              <p:nextCondLst>
-                <p:cond evt="onNext" delay="0">
-                  <p:tgtEl>
-                    <p:sldTgt/>
-                  </p:tgtEl>
-                </p:cond>
-              </p:nextCondLst>
-            </p:seq>
-          </p:childTnLst>
-        </p:cTn>
-      </p:par>
-    </p:tnLst>
-    <p:bldLst>
-      <p:bldP spid="5123" grpId="0" uiExpand="1" build="p"/>
-      <p:bldP spid="4" grpId="0" animBg="1"/>
-      <p:bldP spid="8" grpId="0" animBg="1"/>
-    </p:bldLst>
-  </p:timing>
-</p:sld>
-</file>
-
-<file path=ppt/slides/slide20.xml><?xml version="1.0" encoding="utf-8"?>
+<file path=ppt/slides/slide21.xml><?xml version="1.0" encoding="utf-8"?>
 <p:sld xmlns:a="http://schemas.openxmlformats.org/drawingml/2006/main" xmlns:r="http://schemas.openxmlformats.org/officeDocument/2006/relationships" xmlns:p="http://schemas.openxmlformats.org/presentationml/2006/main">
   <p:cSld>
     <p:spTree>
@@ -11718,7 +11841,7 @@
 </p:sld>
 </file>
 
-<file path=ppt/slides/slide21.xml><?xml version="1.0" encoding="utf-8"?>
+<file path=ppt/slides/slide22.xml><?xml version="1.0" encoding="utf-8"?>
 <p:sld xmlns:a="http://schemas.openxmlformats.org/drawingml/2006/main" xmlns:r="http://schemas.openxmlformats.org/officeDocument/2006/relationships" xmlns:p="http://schemas.openxmlformats.org/presentationml/2006/main">
   <p:cSld>
     <p:spTree>
@@ -12404,7 +12527,7 @@
 </p:sld>
 </file>
 
-<file path=ppt/slides/slide22.xml><?xml version="1.0" encoding="utf-8"?>
+<file path=ppt/slides/slide23.xml><?xml version="1.0" encoding="utf-8"?>
 <p:sld xmlns:a="http://schemas.openxmlformats.org/drawingml/2006/main" xmlns:r="http://schemas.openxmlformats.org/officeDocument/2006/relationships" xmlns:p="http://schemas.openxmlformats.org/presentationml/2006/main">
   <p:cSld>
     <p:bg>
@@ -16066,8 +16189,8 @@
             </a:fontRef>
           </p:style>
         </p:cxnSp>
-        <mc:AlternateContent xmlns:mc="http://schemas.openxmlformats.org/markup-compatibility/2006">
-          <mc:Choice xmlns:a14="http://schemas.microsoft.com/office/drawing/2010/main" Requires="a14">
+        <mc:AlternateContent xmlns:mc="http://schemas.openxmlformats.org/markup-compatibility/2006" xmlns:a14="http://schemas.microsoft.com/office/drawing/2010/main">
+          <mc:Choice Requires="a14">
             <p:sp>
               <p:nvSpPr>
                 <p:cNvPr id="11" name="TextBox 10">
@@ -16096,12 +16219,10 @@
                 </a:bodyPr>
                 <a:lstStyle/>
                 <a:p>
+                  <a:pPr/>
                   <a14:m>
                     <m:oMathPara xmlns:m="http://schemas.openxmlformats.org/officeDocument/2006/math">
-                      <m:oMathParaPr>
-                        <m:jc m:val="centerGroup"/>
-                      </m:oMathParaPr>
-                      <m:oMath xmlns:m="http://schemas.openxmlformats.org/officeDocument/2006/math">
+                      <m:oMath>
                         <m:r>
                           <a:rPr lang="en-US" i="1" dirty="0" smtClean="0">
                             <a:latin typeface="Cambria Math" panose="02040503050406030204" pitchFamily="18" charset="0"/>
@@ -16116,7 +16237,7 @@
               </p:txBody>
             </p:sp>
           </mc:Choice>
-          <mc:Fallback>
+          <mc:Fallback xmlns="">
             <p:sp>
               <p:nvSpPr>
                 <p:cNvPr id="11" name="TextBox 10">
@@ -16161,8 +16282,8 @@
             </p:sp>
           </mc:Fallback>
         </mc:AlternateContent>
-        <mc:AlternateContent xmlns:mc="http://schemas.openxmlformats.org/markup-compatibility/2006">
-          <mc:Choice xmlns:a14="http://schemas.microsoft.com/office/drawing/2010/main" Requires="a14">
+        <mc:AlternateContent xmlns:mc="http://schemas.openxmlformats.org/markup-compatibility/2006" xmlns:a14="http://schemas.microsoft.com/office/drawing/2010/main">
+          <mc:Choice Requires="a14">
             <p:sp>
               <p:nvSpPr>
                 <p:cNvPr id="13" name="TextBox 12">
@@ -16191,12 +16312,10 @@
                 </a:bodyPr>
                 <a:lstStyle/>
                 <a:p>
+                  <a:pPr/>
                   <a14:m>
                     <m:oMathPara xmlns:m="http://schemas.openxmlformats.org/officeDocument/2006/math">
-                      <m:oMathParaPr>
-                        <m:jc m:val="centerGroup"/>
-                      </m:oMathParaPr>
-                      <m:oMath xmlns:m="http://schemas.openxmlformats.org/officeDocument/2006/math">
+                      <m:oMath>
                         <m:r>
                           <a:rPr lang="en-US" i="1" dirty="0" smtClean="0">
                             <a:latin typeface="Cambria Math" panose="02040503050406030204" pitchFamily="18" charset="0"/>
@@ -16211,7 +16330,7 @@
               </p:txBody>
             </p:sp>
           </mc:Choice>
-          <mc:Fallback>
+          <mc:Fallback xmlns="">
             <p:sp>
               <p:nvSpPr>
                 <p:cNvPr id="13" name="TextBox 12">
@@ -16324,8 +16443,8 @@
             </a:p>
           </p:txBody>
         </p:sp>
-        <mc:AlternateContent xmlns:mc="http://schemas.openxmlformats.org/markup-compatibility/2006">
-          <mc:Choice xmlns:a14="http://schemas.microsoft.com/office/drawing/2010/main" Requires="a14">
+        <mc:AlternateContent xmlns:mc="http://schemas.openxmlformats.org/markup-compatibility/2006" xmlns:a14="http://schemas.microsoft.com/office/drawing/2010/main">
+          <mc:Choice Requires="a14">
             <p:sp>
               <p:nvSpPr>
                 <p:cNvPr id="7" name="Rectangle 6">
@@ -16419,7 +16538,7 @@
               </p:txBody>
             </p:sp>
           </mc:Choice>
-          <mc:Fallback>
+          <mc:Fallback xmlns="">
             <p:sp>
               <p:nvSpPr>
                 <p:cNvPr id="7" name="Rectangle 6">
@@ -17054,7 +17173,7 @@
                     <m:sSub>
                       <m:sSubPr>
                         <m:ctrlPr>
-                          <a:rPr lang="en-US" i="1" smtClean="0">
+                          <a:rPr lang="en-US" b="0" i="1" smtClean="0">
                             <a:latin typeface="Cambria Math" panose="02040503050406030204" pitchFamily="18" charset="0"/>
                           </a:rPr>
                         </m:ctrlPr>
@@ -17085,7 +17204,7 @@
                     <m:sSub>
                       <m:sSubPr>
                         <m:ctrlPr>
-                          <a:rPr lang="en-US" i="1" smtClean="0">
+                          <a:rPr lang="en-US" b="0" i="1" smtClean="0">
                             <a:latin typeface="Cambria Math" panose="02040503050406030204" pitchFamily="18" charset="0"/>
                           </a:rPr>
                         </m:ctrlPr>
@@ -17116,7 +17235,7 @@
                     <m:sSub>
                       <m:sSubPr>
                         <m:ctrlPr>
-                          <a:rPr lang="en-US" i="1" smtClean="0">
+                          <a:rPr lang="en-US" b="0" i="1" smtClean="0">
                             <a:latin typeface="Cambria Math" panose="02040503050406030204" pitchFamily="18" charset="0"/>
                           </a:rPr>
                         </m:ctrlPr>
@@ -18786,8 +18905,8 @@
           </a:p>
         </p:txBody>
       </p:sp>
-      <mc:AlternateContent xmlns:mc="http://schemas.openxmlformats.org/markup-compatibility/2006">
-        <mc:Choice xmlns:a14="http://schemas.microsoft.com/office/drawing/2010/main" Requires="a14">
+      <mc:AlternateContent xmlns:mc="http://schemas.openxmlformats.org/markup-compatibility/2006" xmlns:a14="http://schemas.microsoft.com/office/drawing/2010/main">
+        <mc:Choice Requires="a14">
           <p:sp>
             <p:nvSpPr>
               <p:cNvPr id="3" name="Content Placeholder 2">
@@ -18834,10 +18953,7 @@
                 </a:pPr>
                 <a14:m>
                   <m:oMathPara xmlns:m="http://schemas.openxmlformats.org/officeDocument/2006/math">
-                    <m:oMathParaPr>
-                      <m:jc m:val="centerGroup"/>
-                    </m:oMathParaPr>
-                    <m:oMath xmlns:m="http://schemas.openxmlformats.org/officeDocument/2006/math">
+                    <m:oMath>
                       <m:r>
                         <a:rPr lang="en-US" i="1" dirty="0" smtClean="0">
                           <a:solidFill>
@@ -19088,7 +19204,7 @@
             </p:txBody>
           </p:sp>
         </mc:Choice>
-        <mc:Fallback>
+        <mc:Fallback xmlns="">
           <p:sp>
             <p:nvSpPr>
               <p:cNvPr id="3" name="Content Placeholder 2">
